--- a/decks/Bhagavadgita_Concept_KG_kn.pptx
+++ b/decks/Bhagavadgita_Concept_KG_kn.pptx
@@ -2360,7 +2360,7 @@
                 <a:ea typeface="Arial" pitchFamily="34" charset="-122"/>
                 <a:cs typeface="Arial" pitchFamily="34" charset="-120"/>
               </a:rPr>
-              <a:t>92 concepts · 101 relations · 12 tiers</a:t>
+              <a:t>96 concepts · 99 relations · 12 tiers</a:t>
             </a:r>
             <a:endParaRPr lang="en-US" sz="1200" dirty="0"/>
           </a:p>
@@ -3677,7 +3677,7 @@
                 <a:ea typeface="Cambria" pitchFamily="34" charset="-122"/>
                 <a:cs typeface="Cambria" pitchFamily="34" charset="-120"/>
               </a:rPr>
-              <a:t>92</a:t>
+              <a:t>96</a:t>
             </a:r>
             <a:endParaRPr lang="en-US" sz="6400" dirty="0"/>
           </a:p>
@@ -3833,7 +3833,7 @@
                 <a:ea typeface="Cambria" pitchFamily="34" charset="-122"/>
                 <a:cs typeface="Cambria" pitchFamily="34" charset="-120"/>
               </a:rPr>
-              <a:t>101</a:t>
+              <a:t>99</a:t>
             </a:r>
             <a:endParaRPr lang="en-US" sz="6400" dirty="0"/>
           </a:p>
@@ -4126,7 +4126,7 @@
                 <a:ea typeface="Arial" pitchFamily="34" charset="-122"/>
                 <a:cs typeface="Arial" pitchFamily="34" charset="-120"/>
               </a:rPr>
-              <a:t>92 concept nodes</a:t>
+              <a:t>96 concept nodes</a:t>
             </a:r>
             <a:endParaRPr lang="en-US" sz="1800" dirty="0"/>
           </a:p>
@@ -4145,7 +4145,7 @@
                 <a:ea typeface="Arial" pitchFamily="34" charset="-122"/>
                 <a:cs typeface="Arial" pitchFamily="34" charset="-120"/>
               </a:rPr>
-              <a:t>101 typed relations</a:t>
+              <a:t>99 typed relations</a:t>
             </a:r>
             <a:endParaRPr lang="en-US" sz="1800" dirty="0"/>
           </a:p>
@@ -4202,7 +4202,7 @@
                 <a:ea typeface="Arial" pitchFamily="34" charset="-122"/>
                 <a:cs typeface="Arial" pitchFamily="34" charset="-120"/>
               </a:rPr>
-              <a:t>16 Madhva-distinctive callouts</a:t>
+              <a:t>20 Madhva-distinctive callouts</a:t>
             </a:r>
             <a:endParaRPr lang="en-US" sz="1800" dirty="0"/>
           </a:p>
@@ -9911,7 +9911,7 @@
                 <a:ea typeface="Arial" pitchFamily="34" charset="-122"/>
                 <a:cs typeface="Arial" pitchFamily="34" charset="-120"/>
               </a:rPr>
-              <a:t>8</a:t>
+              <a:t>12</a:t>
             </a:r>
             <a:endParaRPr lang="en-US" sz="1400" dirty="0"/>
           </a:p>

--- a/decks/Bhagavadgita_Concept_KG_kn.pptx
+++ b/decks/Bhagavadgita_Concept_KG_kn.pptx
@@ -2360,7 +2360,7 @@
                 <a:ea typeface="Arial" pitchFamily="34" charset="-122"/>
                 <a:cs typeface="Arial" pitchFamily="34" charset="-120"/>
               </a:rPr>
-              <a:t>96 concepts · 99 relations · 12 tiers</a:t>
+              <a:t>112 concepts · 124 relations · 12 tiers</a:t>
             </a:r>
             <a:endParaRPr lang="en-US" sz="1200" dirty="0"/>
           </a:p>
@@ -3677,7 +3677,7 @@
                 <a:ea typeface="Cambria" pitchFamily="34" charset="-122"/>
                 <a:cs typeface="Cambria" pitchFamily="34" charset="-120"/>
               </a:rPr>
-              <a:t>96</a:t>
+              <a:t>112</a:t>
             </a:r>
             <a:endParaRPr lang="en-US" sz="6400" dirty="0"/>
           </a:p>
@@ -3833,7 +3833,7 @@
                 <a:ea typeface="Cambria" pitchFamily="34" charset="-122"/>
                 <a:cs typeface="Cambria" pitchFamily="34" charset="-120"/>
               </a:rPr>
-              <a:t>99</a:t>
+              <a:t>124</a:t>
             </a:r>
             <a:endParaRPr lang="en-US" sz="6400" dirty="0"/>
           </a:p>
@@ -4126,7 +4126,7 @@
                 <a:ea typeface="Arial" pitchFamily="34" charset="-122"/>
                 <a:cs typeface="Arial" pitchFamily="34" charset="-120"/>
               </a:rPr>
-              <a:t>96 concept nodes</a:t>
+              <a:t>112 concept nodes</a:t>
             </a:r>
             <a:endParaRPr lang="en-US" sz="1800" dirty="0"/>
           </a:p>
@@ -4145,7 +4145,7 @@
                 <a:ea typeface="Arial" pitchFamily="34" charset="-122"/>
                 <a:cs typeface="Arial" pitchFamily="34" charset="-120"/>
               </a:rPr>
-              <a:t>99 typed relations</a:t>
+              <a:t>124 typed relations</a:t>
             </a:r>
             <a:endParaRPr lang="en-US" sz="1800" dirty="0"/>
           </a:p>
@@ -4202,7 +4202,7 @@
                 <a:ea typeface="Arial" pitchFamily="34" charset="-122"/>
                 <a:cs typeface="Arial" pitchFamily="34" charset="-120"/>
               </a:rPr>
-              <a:t>20 Madhva-distinctive callouts</a:t>
+              <a:t>22 Madhva-distinctive callouts</a:t>
             </a:r>
             <a:endParaRPr lang="en-US" sz="1800" dirty="0"/>
           </a:p>
@@ -8984,7 +8984,7 @@
                 <a:ea typeface="Arial" pitchFamily="34" charset="-122"/>
                 <a:cs typeface="Arial" pitchFamily="34" charset="-120"/>
               </a:rPr>
-              <a:t>8</a:t>
+              <a:t>10</a:t>
             </a:r>
             <a:endParaRPr lang="en-US" sz="1400" dirty="0"/>
           </a:p>
@@ -9293,7 +9293,7 @@
                 <a:ea typeface="Arial" pitchFamily="34" charset="-122"/>
                 <a:cs typeface="Arial" pitchFamily="34" charset="-120"/>
               </a:rPr>
-              <a:t>8</a:t>
+              <a:t>12</a:t>
             </a:r>
             <a:endParaRPr lang="en-US" sz="1400" dirty="0"/>
           </a:p>
@@ -9499,7 +9499,7 @@
                 <a:ea typeface="Arial" pitchFamily="34" charset="-122"/>
                 <a:cs typeface="Arial" pitchFamily="34" charset="-120"/>
               </a:rPr>
-              <a:t>9</a:t>
+              <a:t>18</a:t>
             </a:r>
             <a:endParaRPr lang="en-US" sz="1400" dirty="0"/>
           </a:p>
@@ -9705,7 +9705,7 @@
                 <a:ea typeface="Arial" pitchFamily="34" charset="-122"/>
                 <a:cs typeface="Arial" pitchFamily="34" charset="-120"/>
               </a:rPr>
-              <a:t>8</a:t>
+              <a:t>9</a:t>
             </a:r>
             <a:endParaRPr lang="en-US" sz="1400" dirty="0"/>
           </a:p>

--- a/decks/Bhagavadgita_Concept_KG_kn.pptx
+++ b/decks/Bhagavadgita_Concept_KG_kn.pptx
@@ -3385,7 +3385,7 @@
                 <a:ea typeface="Tiro Kannada" pitchFamily="34" charset="-122"/>
                 <a:cs typeface="Tiro Kannada" pitchFamily="34" charset="-120"/>
               </a:rPr>
-              <a:t>ಅಂತಃಕರಣ</a:t>
+              <a:t>à²…à²‚à²¤à²ƒà²•à²°à²£</a:t>
             </a:r>
             <a:endParaRPr lang="en-US" sz="3000" dirty="0"/>
           </a:p>
@@ -3516,7 +3516,7 @@
                 <a:ea typeface="Tiro Kannada" pitchFamily="34" charset="-122"/>
                 <a:cs typeface="Tiro Kannada" pitchFamily="34" charset="-120"/>
               </a:rPr>
-              <a:t>ಅಂತರ್ಯಾಮೀ — ಹೃದಯೇ ಹರಿಃ</a:t>
+              <a:t>à²…à²‚à²¤à²°à³à²¯à²¾à²®à³€ â€” à²¹à³ƒà²¦à²¯à³‡ à²¹à²°à²¿à²ƒ</a:t>
             </a:r>
             <a:endParaRPr lang="en-US" sz="1300" dirty="0"/>
           </a:p>
@@ -3597,7 +3597,7 @@
                 <a:ea typeface="Tiro Kannada" pitchFamily="34" charset="-122"/>
                 <a:cs typeface="Tiro Kannada" pitchFamily="34" charset="-120"/>
               </a:rPr>
-              <a:t>"ಈಶ್ವರಃ ಸರ್ವ-ಭೂತಾನಾಂ ಹೃದ್ದೇಶೇಽರ್ಜುನ ತಿಷ್ಠತಿ" — ಭಗವಾನ್ ಸರ್ವೇಷಾಂ ಪ್ರಾಣಿನಾಂ ಹೃದಯೇ ಸ್ಥಿತ್ವಾ ತಾನ್ ಸಂಚಾಲಯತಿ।</a:t>
+              <a:t>"à²ˆà²¶à³à²µà²°à²ƒ à²¸à²°à³à²µ-à²­à³‚à²¤à²¾à²¨à²¾à²‚ à²¹à³ƒà²¦à³à²¦à³‡à²¶à³‡à²½à²°à³à²œà³à²¨ à²¤à²¿à²·à³à² à²¤à²¿" â€” à²­à²—à²µà²¾à²¨à³ à²¸à²°à³à²µà³‡à²·à²¾à²‚ à²ªà³à²°à²¾à²£à²¿à²¨à²¾à²‚ à²¹à³ƒà²¦à²¯à³‡ à²¸à³à²¥à²¿à²¤à³à²µà²¾ à²¤à²¾à²¨à³ à²¸à²‚à…</a:t>
             </a:r>
             <a:endParaRPr lang="en-US" sz="1050" dirty="0"/>
           </a:p>
@@ -3686,7 +3686,7 @@
                 <a:ea typeface="Tiro Kannada" pitchFamily="34" charset="-122"/>
                 <a:cs typeface="Tiro Kannada" pitchFamily="34" charset="-120"/>
               </a:rPr>
-              <a:t>ಮನಸ್</a:t>
+              <a:t>à²®à²¨à²¸à³</a:t>
             </a:r>
             <a:endParaRPr lang="en-US" sz="1300" dirty="0"/>
           </a:p>
@@ -3725,7 +3725,7 @@
                 <a:ea typeface="Cormorant Garamond" pitchFamily="34" charset="-122"/>
                 <a:cs typeface="Cormorant Garamond" pitchFamily="34" charset="-120"/>
               </a:rPr>
-              <a:t>BG 6.34–35 · 3.6–7</a:t>
+              <a:t>BG 6.34â€“35 Â· 3.6â€“7</a:t>
             </a:r>
             <a:endParaRPr lang="en-US" sz="950" dirty="0"/>
           </a:p>
@@ -3767,7 +3767,7 @@
                 <a:ea typeface="Tiro Kannada" pitchFamily="34" charset="-122"/>
                 <a:cs typeface="Tiro Kannada" pitchFamily="34" charset="-120"/>
               </a:rPr>
-              <a:t>ಏಕಾದಶಮ್ ಇಂದ್ರಿಯಮ್। ಚಂಚಲಂ ಪ್ರಮಾಥಿ ದುರ್ನಿಗ್ರಹಮ್ — ತಥಾಪಿ ಕೃಷ್ಣಃ ಕಥಯತಿ ಯದ್ ಅಭ್ಯಾಸೇನ ವೈರಾಗ್ಯೇಣ ಚ ತದ್ ನಿಗೃಹ್ಯತೇ।</a:t>
+              <a:t>à²à²•à²¾à²¦à²¶à²®à³ à²‡à²‚à²¦à³à²°à²¿à²¯à²®à³à¥¤ à²šà²‚à²šà²²à²‚ à²ªà³à²°à²®à²¾à²¥à²¿ à²¦à³à²°à³à²¨à²¿à²—à³à²°à²¹à²®à³ â€” à²¤à²¥à²¾à²ªà²¿ à²•à³ƒà²·à³à²£à²ƒ à²•à²¥à²¯à²¤à²¿ à²¯à²¦à³ à²…à²­à³à²¯à²¾à²¸à³‡à²¨ à²µà³ˆà²°à²¾à²—à³à²¯à³‡à²£ à²š à²¤à²¦à³…</a:t>
             </a:r>
             <a:endParaRPr lang="en-US" sz="1050" dirty="0"/>
           </a:p>
@@ -3856,7 +3856,7 @@
                 <a:ea typeface="Tiro Kannada" pitchFamily="34" charset="-122"/>
                 <a:cs typeface="Tiro Kannada" pitchFamily="34" charset="-120"/>
               </a:rPr>
-              <a:t>ಬುದ್ಧಿಃ</a:t>
+              <a:t>à²¬à³à²¦à³à²§à²¿à²ƒ</a:t>
             </a:r>
             <a:endParaRPr lang="en-US" sz="1300" dirty="0"/>
           </a:p>
@@ -3895,7 +3895,7 @@
                 <a:ea typeface="Cormorant Garamond" pitchFamily="34" charset="-122"/>
                 <a:cs typeface="Cormorant Garamond" pitchFamily="34" charset="-120"/>
               </a:rPr>
-              <a:t>BG 18.30–32</a:t>
+              <a:t>BG 18.30â€“32</a:t>
             </a:r>
             <a:endParaRPr lang="en-US" sz="950" dirty="0"/>
           </a:p>
@@ -3937,7 +3937,7 @@
                 <a:ea typeface="Tiro Kannada" pitchFamily="34" charset="-122"/>
                 <a:cs typeface="Tiro Kannada" pitchFamily="34" charset="-120"/>
               </a:rPr>
-              <a:t>ಕಾರ್ಯಾಕಾರ್ಯ-ವಿವೇಚನೀ ವೃತ್ತಿಃ। ಸಾತ್ತ್ವಿಕೀ ಬುದ್ಧಿಃ ಪ್ರವೃತ್ತಿಂ ನಿವೃತ್ತಿಂ ಚ ಜಾನಾತಿ।</a:t>
+              <a:t>à²•à²¾à²°à³à²¯à²¾à²•à²¾à²°à³à²¯-à²µà²¿à²µà³‡à²šà²¨à³€ à²µà³ƒà²¤à³à²¤à²¿à²ƒà¥¤ à²¸à²¾à²¤à³à²¤à³à²µà²¿à²•à³€ à²¬à³à²¦à³à²§à²¿à²ƒ à²ªà³à²°à²µà³ƒà²¤à³à²¤à²¿à²‚ à²¨à²¿à²µà³ƒà²¤à³à²¤à²¿à²‚ à²š à²œà²¾à²¨à²¾à²¤à²¿à¥¤</a:t>
             </a:r>
             <a:endParaRPr lang="en-US" sz="1050" dirty="0"/>
           </a:p>
@@ -4026,7 +4026,7 @@
                 <a:ea typeface="Tiro Kannada" pitchFamily="34" charset="-122"/>
                 <a:cs typeface="Tiro Kannada" pitchFamily="34" charset="-120"/>
               </a:rPr>
-              <a:t>ಅಹಂಕಾರಃ</a:t>
+              <a:t>à²…à²¹à²‚à²•à²¾à²°à²ƒ</a:t>
             </a:r>
             <a:endParaRPr lang="en-US" sz="1300" dirty="0"/>
           </a:p>
@@ -4065,7 +4065,7 @@
                 <a:ea typeface="Cormorant Garamond" pitchFamily="34" charset="-122"/>
                 <a:cs typeface="Cormorant Garamond" pitchFamily="34" charset="-120"/>
               </a:rPr>
-              <a:t>BG 3.27 · 7.4</a:t>
+              <a:t>BG 3.27 Â· 7.4</a:t>
             </a:r>
             <a:endParaRPr lang="en-US" sz="950" dirty="0"/>
           </a:p>
@@ -4107,7 +4107,7 @@
                 <a:ea typeface="Tiro Kannada" pitchFamily="34" charset="-122"/>
                 <a:cs typeface="Tiro Kannada" pitchFamily="34" charset="-120"/>
               </a:rPr>
-              <a:t>ಕರ್ತೃತ್ವ-ಅಭಿಮಾನಃ। "ಕರ್ತಾಹಮ್ ಇತಿ ಮನ್ಯತೇ" — ಅಹಂಕಾರ-ವಿಮೂಢಾತ್ಮಾ ಪುರುಷಃ ಸ್ವಮ್ ಕರ್ತಾರಂ ಮನ್ಯತೇ।</a:t>
+              <a:t>à²•à²°à³à²¤à³ƒà²¤à³à²µ-à²…à²­à²¿à²®à²¾à²¨à²ƒà¥¤ "à²•à²°à³à²¤à²¾à²¹à²®à³ à²‡à²¤à²¿ à²®à²¨à³à²¯à²¤à³‡" â€” à²…à²¹à²‚à²•à²¾à²°-à²µà²¿à²®à³‚à²¢à²¾à²¤à³à²®à²¾ à²ªà³à²°à³à²·à²ƒ à²¸à³à²µà²®à³ à²•à²°à³à²¤à²¾à²°à²‚ à²®à²¨à³à²¯à²¤à³‡à¥¤</a:t>
             </a:r>
             <a:endParaRPr lang="en-US" sz="1050" dirty="0"/>
           </a:p>
@@ -4217,7 +4217,7 @@
                 <a:ea typeface="Tiro Kannada" pitchFamily="34" charset="-122"/>
                 <a:cs typeface="Tiro Kannada" pitchFamily="34" charset="-120"/>
               </a:rPr>
-              <a:t>ಧರ್ಮ</a:t>
+              <a:t>à²§à²°à³à²®</a:t>
             </a:r>
             <a:endParaRPr lang="en-US" sz="3000" dirty="0"/>
           </a:p>
@@ -4348,7 +4348,7 @@
                 <a:ea typeface="Tiro Kannada" pitchFamily="34" charset="-122"/>
                 <a:cs typeface="Tiro Kannada" pitchFamily="34" charset="-120"/>
               </a:rPr>
-              <a:t>ಸ್ವಧರ್ಮಃ</a:t>
+              <a:t>à²¸à³à²µà²§à²°à³à²®à²ƒ</a:t>
             </a:r>
             <a:endParaRPr lang="en-US" sz="1300" dirty="0"/>
           </a:p>
@@ -4387,7 +4387,7 @@
                 <a:ea typeface="Cormorant Garamond" pitchFamily="34" charset="-122"/>
                 <a:cs typeface="Cormorant Garamond" pitchFamily="34" charset="-120"/>
               </a:rPr>
-              <a:t>BG 3.35 · 18.47</a:t>
+              <a:t>BG 3.35 Â· 18.47</a:t>
             </a:r>
             <a:endParaRPr lang="en-US" sz="950" dirty="0"/>
           </a:p>
@@ -4429,7 +4429,7 @@
                 <a:ea typeface="Tiro Kannada" pitchFamily="34" charset="-122"/>
                 <a:cs typeface="Tiro Kannada" pitchFamily="34" charset="-120"/>
               </a:rPr>
-              <a:t>"ಶ್ರೇಯಾನ್ ಸ್ವಧರ್ಮೋ ವಿಗುಣಃ ಪರಧರ್ಮಾತ್ ಸ್ವನುಷ್ಠಿತಾತ್" — ಸ್ವ-ಸ್ವಭಾವ-ಜಾತಂ ಕರ್ಮ ಏವ ಅನುಷ್ಠೇಯಮ್।</a:t>
+              <a:t>"à²¶à³à²°à³‡à²¯à²¾à²¨à³ à²¸à³à²µà²§à²°à³à²®à³‹ à²µà²¿à²—à³à²£à²ƒ à²ªà²°à²§à²°à³à²®à²¾à²¤à³ à²¸à³à²µà²¨à³à²·à³à² à²¿à²¤à²¾à²¤à³" â€” à²¸à³à²µ-à²¸à³à²µà²­à²¾à²µ-à²œà²¾à²¤à²‚ à²•à²°à³à²® à²à²µ à²…à²¨à³à²·à³à² à³‡à²¯à²®à³à¥¤</a:t>
             </a:r>
             <a:endParaRPr lang="en-US" sz="1050" dirty="0"/>
           </a:p>
@@ -4518,7 +4518,7 @@
                 <a:ea typeface="Tiro Kannada" pitchFamily="34" charset="-122"/>
                 <a:cs typeface="Tiro Kannada" pitchFamily="34" charset="-120"/>
               </a:rPr>
-              <a:t>ವರ್ಣ-ಸ್ವಭಾವಃ</a:t>
+              <a:t>à²µà²°à³à²£-à²¸à³à²µà²­à²¾à²µà²ƒ</a:t>
             </a:r>
             <a:endParaRPr lang="en-US" sz="1300" dirty="0"/>
           </a:p>
@@ -4557,7 +4557,7 @@
                 <a:ea typeface="Cormorant Garamond" pitchFamily="34" charset="-122"/>
                 <a:cs typeface="Cormorant Garamond" pitchFamily="34" charset="-120"/>
               </a:rPr>
-              <a:t>BG 4.13 · 18.41–44</a:t>
+              <a:t>BG 4.13 Â· 18.41â€“44</a:t>
             </a:r>
             <a:endParaRPr lang="en-US" sz="950" dirty="0"/>
           </a:p>
@@ -4599,7 +4599,7 @@
                 <a:ea typeface="Tiro Kannada" pitchFamily="34" charset="-122"/>
                 <a:cs typeface="Tiro Kannada" pitchFamily="34" charset="-120"/>
               </a:rPr>
-              <a:t>ಬ್ರಾಹ್ಮಣ-ಕ್ಷತ್ರಿಯ-ವೈಶ್ಯ-ಶೂದ್ರಾಃ — ಗುಣ-ಕರ್ಮ-ವಿಭಾಗೇನ ಉದ್ಭೂತಾಃ ಕರ್ತವ್ಯಾಃ। ಮಾಧ್ವಮತೇ ಏತೇ ಜೀವಾನಾಂ ನಿತ್ಯ-ಸ್ವರೂಪ-ಯೋಗ್ಯತಾಯಾಂ ನಿಹಿತಾಃ।</a:t>
+              <a:t>à²¬à³à²°à²¾à²¹à³à²®à²£-à²•à³à²·à²¤à³à²°à²¿à²¯-à²µà³ˆà²¶à³à²¯-à²¶à³‚à²¦à³à²°à²¾à²ƒ â€” à²—à³à²£-à²•à²°à³à²®-à²µà²¿à²­à²¾à²—à³‡à²¨ à²‰à²¦à³à²­à³‚à²¤à²¾à²ƒ à²•à²°à³à²¤à²µà³à²¯à²¾à²ƒà¥¤ à²®à²¾à²§à³à²µà²®à²¤à³‡ à²à²¤à³‡ à²œà³€à²µà²¾à²¨à²¾à²‚ à²¨à²¿à²…</a:t>
             </a:r>
             <a:endParaRPr lang="en-US" sz="1050" dirty="0"/>
           </a:p>
@@ -4688,7 +4688,7 @@
                 <a:ea typeface="Tiro Kannada" pitchFamily="34" charset="-122"/>
                 <a:cs typeface="Tiro Kannada" pitchFamily="34" charset="-120"/>
               </a:rPr>
-              <a:t>ನಿಷ್ಕಾಮ-ಕರ್ಮ</a:t>
+              <a:t>à²¨à²¿à²·à³à²•à²¾à²®-à²•à²°à³à²®</a:t>
             </a:r>
             <a:endParaRPr lang="en-US" sz="1300" dirty="0"/>
           </a:p>
@@ -4727,7 +4727,7 @@
                 <a:ea typeface="Cormorant Garamond" pitchFamily="34" charset="-122"/>
                 <a:cs typeface="Cormorant Garamond" pitchFamily="34" charset="-120"/>
               </a:rPr>
-              <a:t>BG 2.47 · 4.20</a:t>
+              <a:t>BG 2.47 Â· 4.20</a:t>
             </a:r>
             <a:endParaRPr lang="en-US" sz="950" dirty="0"/>
           </a:p>
@@ -4769,7 +4769,7 @@
                 <a:ea typeface="Tiro Kannada" pitchFamily="34" charset="-122"/>
                 <a:cs typeface="Tiro Kannada" pitchFamily="34" charset="-120"/>
               </a:rPr>
-              <a:t>ಫಲಾಕಾಂಕ್ಷಾಂ ವಿನಾ ಅನುಷ್ಠಿತಂ ಕರ್ಮ। ಗೀತಾಯಾಃ ಮುಖ್ಯಃ ನೈತಿಕಃ ಆದೇಶಃ।</a:t>
+              <a:t>à²«à²²à²¾à²•à²¾à²‚à²•à³à²·à²¾à²‚ à²µà²¿à²¨à²¾ à²…à²¨à³à²·à³à² à²¿à²¤à²‚ à²•à²°à³à²®à¥¤ à²—à³€à²¤à²¾à²¯à²¾à²ƒ à²®à³à²–à³à²¯à²ƒ à²¨à³ˆà²¤à²¿à²•à²ƒ à²†à²¦à³‡à²¶à²ƒà¥¤</a:t>
             </a:r>
             <a:endParaRPr lang="en-US" sz="1050" dirty="0"/>
           </a:p>
@@ -4858,7 +4858,7 @@
                 <a:ea typeface="Tiro Kannada" pitchFamily="34" charset="-122"/>
                 <a:cs typeface="Tiro Kannada" pitchFamily="34" charset="-120"/>
               </a:rPr>
-              <a:t>ಸ್ಥಿತಪ್ರಜ್ಞಃ</a:t>
+              <a:t>à²¸à³à²¥à²¿à²¤à²ªà³à²°à²œà³à²žà²ƒ</a:t>
             </a:r>
             <a:endParaRPr lang="en-US" sz="1300" dirty="0"/>
           </a:p>
@@ -4897,7 +4897,7 @@
                 <a:ea typeface="Cormorant Garamond" pitchFamily="34" charset="-122"/>
                 <a:cs typeface="Cormorant Garamond" pitchFamily="34" charset="-120"/>
               </a:rPr>
-              <a:t>BG 2.55–72</a:t>
+              <a:t>BG 2.55â€“72</a:t>
             </a:r>
             <a:endParaRPr lang="en-US" sz="950" dirty="0"/>
           </a:p>
@@ -4939,7 +4939,7 @@
                 <a:ea typeface="Tiro Kannada" pitchFamily="34" charset="-122"/>
                 <a:cs typeface="Tiro Kannada" pitchFamily="34" charset="-120"/>
               </a:rPr>
-              <a:t>ಸುಖ-ದುಃಖಯೋಃ ಸಮಃ, ಸಂಗ-ಭಯ-ಕ್ರೋಧ-ವಿಮುಕ್ತಃ, ಸರ್ವತಃ ಸಂಕುಚಿತ-ಇಂದ್ರಿಯಃ। ದ್ವಿತೀಯಾಧ್ಯಾಯಸ್ಯ ಅಂತಿಮಂ ಚಿತ್ರಣಮ್।</a:t>
+              <a:t>à²¸à³à²–-à²¦à³à²ƒà²–à²¯à³‹à²ƒ à²¸à²®à²ƒ, à²¸à²‚à²—-à²­à²¯-à²•à³à²°à³‹à²§-à²µà²¿à²®à³à²•à³à²¤à²ƒ, à²¸à²°à³à²µà²¤à²ƒ à²¸à²‚à²•à³à²šà²¿à²¤-à²‡à²‚à²¦à³à²°à²¿à²¯à²ƒà¥¤ à²¦à³à²µà²¿à²¤à³€à²¯à²¾à²§à³à²¯à²¾à²¯à²¸à³à²¯ à²…à²‚à²¤à²¿à²®à²‚ à²šà²¿à²¤à³à²°à²£à…</a:t>
             </a:r>
             <a:endParaRPr lang="en-US" sz="1050" dirty="0"/>
           </a:p>
@@ -5049,7 +5049,7 @@
                 <a:ea typeface="Tiro Kannada" pitchFamily="34" charset="-122"/>
                 <a:cs typeface="Tiro Kannada" pitchFamily="34" charset="-120"/>
               </a:rPr>
-              <a:t>ದೋಷ</a:t>
+              <a:t>à²¦à³‹à²·</a:t>
             </a:r>
             <a:endParaRPr lang="en-US" sz="3000" dirty="0"/>
           </a:p>
@@ -5180,7 +5180,7 @@
                 <a:ea typeface="Tiro Kannada" pitchFamily="34" charset="-122"/>
                 <a:cs typeface="Tiro Kannada" pitchFamily="34" charset="-120"/>
               </a:rPr>
-              <a:t>ಆಸುರೀ ಸಂಪತ್</a:t>
+              <a:t>à²†à²¸à³à²°à³€ à²¸à²‚à²ªà²¤à³</a:t>
             </a:r>
             <a:endParaRPr lang="en-US" sz="1300" dirty="0"/>
           </a:p>
@@ -5219,7 +5219,7 @@
                 <a:ea typeface="Cormorant Garamond" pitchFamily="34" charset="-122"/>
                 <a:cs typeface="Cormorant Garamond" pitchFamily="34" charset="-120"/>
               </a:rPr>
-              <a:t>BG 16.4 · 16.7–20</a:t>
+              <a:t>BG 16.4 Â· 16.7â€“20</a:t>
             </a:r>
             <a:endParaRPr lang="en-US" sz="950" dirty="0"/>
           </a:p>
@@ -5261,7 +5261,7 @@
                 <a:ea typeface="Tiro Kannada" pitchFamily="34" charset="-122"/>
                 <a:cs typeface="Tiro Kannada" pitchFamily="34" charset="-120"/>
               </a:rPr>
-              <a:t>ದಂಭಃ ದರ್ಪಃ ಅಭಿಮಾನಃ ಕ್ರೋಧಃ ಪಾರುಷ್ಯಮ್ ಅಜ್ಞಾನಮ್ — ದೈವೀ-ಸಂಪದಃ ವಿಪರೀತಮ್। ಬಂಧಾಯ ಕಲ್ಪತೇ।</a:t>
+              <a:t>à²¦à²‚à²­à²ƒ à²¦à²°à³à²ªà²ƒ à²…à²­à²¿à²®à²¾à²¨à²ƒ à²•à³à²°à³‹à²§à²ƒ à²ªà²¾à²°à³à²·à³à²¯à²®à³ à²…à²œà³à²žà²¾à²¨à²®à³ â€” à²¦à³ˆà²µà³€-à²¸à²‚à²ªà²¦à²ƒ à²µà²¿à²ªà²°à³€à²¤à²®à³à¥¤ à²¬à²‚à²§à²¾à²¯ à²•à²²à³à²ªà²¤à³‡à¥¤</a:t>
             </a:r>
             <a:endParaRPr lang="en-US" sz="1050" dirty="0"/>
           </a:p>
@@ -5350,7 +5350,7 @@
                 <a:ea typeface="Tiro Kannada" pitchFamily="34" charset="-122"/>
                 <a:cs typeface="Tiro Kannada" pitchFamily="34" charset="-120"/>
               </a:rPr>
-              <a:t>ಕಾಮಃ</a:t>
+              <a:t>à²•à²¾à²®à²ƒ</a:t>
             </a:r>
             <a:endParaRPr lang="en-US" sz="1300" dirty="0"/>
           </a:p>
@@ -5389,7 +5389,7 @@
                 <a:ea typeface="Cormorant Garamond" pitchFamily="34" charset="-122"/>
                 <a:cs typeface="Cormorant Garamond" pitchFamily="34" charset="-120"/>
               </a:rPr>
-              <a:t>BG 3.37–39</a:t>
+              <a:t>BG 3.37â€“39</a:t>
             </a:r>
             <a:endParaRPr lang="en-US" sz="950" dirty="0"/>
           </a:p>
@@ -5431,7 +5431,7 @@
                 <a:ea typeface="Tiro Kannada" pitchFamily="34" charset="-122"/>
                 <a:cs typeface="Tiro Kannada" pitchFamily="34" charset="-120"/>
               </a:rPr>
-              <a:t>"ರಜೋಗುಣ-ಸಮುದ್ಭವಃ, ಮಹಾಶನಃ, ಮಹಾಪಾಪ್ಮಾ, ಇಹ ವೈರೀ" — ಕೃಷ್ಣಃ ಕಾಮಂ ಪ್ರಥಮಂ ಶತ್ರುಂ ನಾಮ್ನಾ ನಿರ್ದಿಶತಿ।</a:t>
+              <a:t>"à²°à²œà³‹à²—à³à²£-à²¸à²®à³à²¦à³à²­à²µà²ƒ, à²®à²¹à²¾à²¶à²¨à²ƒ, à²®à²¹à²¾à²ªà²¾à²ªà³à²®à²¾, à²‡à²¹ à²µà³ˆà²°à³€" â€” à²•à³ƒà²·à³à²£à²ƒ à²•à²¾à²®à²‚ à²ªà³à²°à²¥à²®à²‚ à²¶à²¤à³à²°à³à²‚ à²¨à²¾à²®à³à²¨à²¾ à²¨à²¿à²°à³à²¦à²¿à²¶à²¤à²¿à¥¤</a:t>
             </a:r>
             <a:endParaRPr lang="en-US" sz="1050" dirty="0"/>
           </a:p>
@@ -5520,7 +5520,7 @@
                 <a:ea typeface="Tiro Kannada" pitchFamily="34" charset="-122"/>
                 <a:cs typeface="Tiro Kannada" pitchFamily="34" charset="-120"/>
               </a:rPr>
-              <a:t>ಕ್ರೋಧಃ</a:t>
+              <a:t>à²•à³à²°à³‹à²§à²ƒ</a:t>
             </a:r>
             <a:endParaRPr lang="en-US" sz="1300" dirty="0"/>
           </a:p>
@@ -5559,7 +5559,7 @@
                 <a:ea typeface="Cormorant Garamond" pitchFamily="34" charset="-122"/>
                 <a:cs typeface="Cormorant Garamond" pitchFamily="34" charset="-120"/>
               </a:rPr>
-              <a:t>BG 2.62–63 · 3.37</a:t>
+              <a:t>BG 2.62â€“63 Â· 3.37</a:t>
             </a:r>
             <a:endParaRPr lang="en-US" sz="950" dirty="0"/>
           </a:p>
@@ -5601,7 +5601,7 @@
                 <a:ea typeface="Tiro Kannada" pitchFamily="34" charset="-122"/>
                 <a:cs typeface="Tiro Kannada" pitchFamily="34" charset="-120"/>
               </a:rPr>
-              <a:t>ಕಾಮ-ವಿಘಾತಾತ್ ಕ್ರೋಧಃ ಉದ್ಭವತಿ; ಕ್ರೋಧಾತ್ ಸಂಮೋಹಃ; ಸಂಮೋಹಾತ್ ಸ್ಮೃತಿ-ವಿಭ್ರಮಃ।</a:t>
+              <a:t>à²•à²¾à²®-à²µà²¿à²˜à²¾à²¤à²¾à²¤à³ à²•à³à²°à³‹à²§à²ƒ à²‰à²¦à³à²­à²µà²¤à²¿; à²•à³à²°à³‹à²§à²¾à²¤à³ à²¸à²‚à²®à³‹à²¹à²ƒ; à²¸à²‚à²®à³‹à²¹à²¾à²¤à³ à²¸à³à²®à³ƒà²¤à²¿-à²µà²¿à²­à³à²°à²®à²ƒà¥¤</a:t>
             </a:r>
             <a:endParaRPr lang="en-US" sz="1050" dirty="0"/>
           </a:p>
@@ -5690,7 +5690,7 @@
                 <a:ea typeface="Tiro Kannada" pitchFamily="34" charset="-122"/>
                 <a:cs typeface="Tiro Kannada" pitchFamily="34" charset="-120"/>
               </a:rPr>
-              <a:t>ಲೋಭಃ</a:t>
+              <a:t>à²²à³‹à²­à²ƒ</a:t>
             </a:r>
             <a:endParaRPr lang="en-US" sz="1300" dirty="0"/>
           </a:p>
@@ -5771,7 +5771,7 @@
                 <a:ea typeface="Tiro Kannada" pitchFamily="34" charset="-122"/>
                 <a:cs typeface="Tiro Kannada" pitchFamily="34" charset="-120"/>
               </a:rPr>
-              <a:t>ಕಾಮ-ಕ್ರೋಧಾಭ್ಯಾಂ ಸಹ ನರಕಸ್ಯ ತ್ರಿವಿಧಂ ದ್ವಾರಮ್। ಮಾರ್ಗಾರಂಭೇ ಏವ ತ್ಯಜನೀಯಃ।</a:t>
+              <a:t>à²•à²¾à²®-à²•à³à²°à³‹à²§à²¾à²­à³à²¯à²¾à²‚ à²¸à²¹ à²¨à²°à²•à²¸à³à²¯ à²¤à³à²°à²¿à²µà²¿à²§à²‚ à²¦à³à²µà²¾à²°à²®à³à¥¤ à²®à²¾à²°à³à²—à²¾à²°à²‚à²­à³‡ à²à²µ à²¤à³à²¯à²œà²¨à³€à²¯à²ƒà¥¤</a:t>
             </a:r>
             <a:endParaRPr lang="en-US" sz="1050" dirty="0"/>
           </a:p>
@@ -5881,7 +5881,7 @@
                 <a:ea typeface="Tiro Kannada" pitchFamily="34" charset="-122"/>
                 <a:cs typeface="Tiro Kannada" pitchFamily="34" charset="-120"/>
               </a:rPr>
-              <a:t>ಫಲ</a:t>
+              <a:t>à²«à²²</a:t>
             </a:r>
             <a:endParaRPr lang="en-US" sz="3000" dirty="0"/>
           </a:p>
@@ -6012,7 +6012,7 @@
                 <a:ea typeface="Tiro Kannada" pitchFamily="34" charset="-122"/>
                 <a:cs typeface="Tiro Kannada" pitchFamily="34" charset="-120"/>
               </a:rPr>
-              <a:t>ಮೋಕ್ಷಃ</a:t>
+              <a:t>à²®à³‹à²•à³à²·à²ƒ</a:t>
             </a:r>
             <a:endParaRPr lang="en-US" sz="1300" dirty="0"/>
           </a:p>
@@ -6051,7 +6051,7 @@
                 <a:ea typeface="Cormorant Garamond" pitchFamily="34" charset="-122"/>
                 <a:cs typeface="Cormorant Garamond" pitchFamily="34" charset="-120"/>
               </a:rPr>
-              <a:t>BG 5.24–26 · 18.66</a:t>
+              <a:t>BG 5.24â€“26 Â· 18.66</a:t>
             </a:r>
             <a:endParaRPr lang="en-US" sz="950" dirty="0"/>
           </a:p>
@@ -6093,7 +6093,7 @@
                 <a:ea typeface="Tiro Kannada" pitchFamily="34" charset="-122"/>
                 <a:cs typeface="Tiro Kannada" pitchFamily="34" charset="-120"/>
               </a:rPr>
-              <a:t>ಸಂಸಾರಾತ್ ವಿನಿರ್ಮುಕ್ತಿಃ ಹರೇಃ ನಿತ್ಯಸನ್ನಿಧಿಪ್ರಾಪ್ತಿಶ್ಚ। ಮಾಧ್ವಮತೇ ಮೋಕ್ಷಸ್ಯ ಚತುರ್ವಿಧಂ ತಾರತಮ್ಯಮ್ — ಸಾಲೋಕ್ಯ-ಸಾರ್ಷ್ಟಿ-ಸಾಮೀಪ್ಯ-ಸಾರೂಪ್ಯ-ಸಾಯುಜ್ಯಭೇದೇನ।</a:t>
+              <a:t>à²¸à²‚à²¸à²¾à²°à²¾à²¤à³ à²µà²¿à²¨à²¿à²°à³à²®à³à²•à³à²¤à²¿à²ƒ à²¹à²°à³‡à²ƒ à²¨à²¿à²¤à³à²¯à²¸à²¨à³à²¨à²¿à²§à²¿à²ªà³à²°à²¾à²ªà³à²¤à²¿à²¶à³à²šà¥¤ à²®à²¾à²§à³à²µà²®à²¤à³‡ à²®à³‹à²•à³à²·à²¸à³à²¯ à²šà²¤à³à²°à³à²µà²¿à²§à²‚ à²¤à²¾à²°à²¤à²®à³à²¯à²®à³ â…</a:t>
             </a:r>
             <a:endParaRPr lang="en-US" sz="1050" dirty="0"/>
           </a:p>
@@ -6182,7 +6182,7 @@
                 <a:ea typeface="Tiro Kannada" pitchFamily="34" charset="-122"/>
                 <a:cs typeface="Tiro Kannada" pitchFamily="34" charset="-120"/>
               </a:rPr>
-              <a:t>ಚರಮಶ್ಲೋಕ-ಫಲಮ್</a:t>
+              <a:t>à²šà²°à²®à²¶à³à²²à³‹à²•-à²«à²²à²®à³</a:t>
             </a:r>
             <a:endParaRPr lang="en-US" sz="1300" dirty="0"/>
           </a:p>
@@ -6263,7 +6263,7 @@
                 <a:ea typeface="Tiro Kannada" pitchFamily="34" charset="-122"/>
                 <a:cs typeface="Tiro Kannada" pitchFamily="34" charset="-120"/>
               </a:rPr>
-              <a:t>"ಅಹಂ ತ್ವಾ ಸರ್ವಪಾಪೇಭ್ಯೋ ಮೋಕ್ಷಯಿಷ್ಯಾಮಿ ಮಾ ಶುಚಃ" — ಅಷ್ಟಾದಶಾಧ್ಯಾಯೇ ಕೃಷ್ಣಸ್ಯ ಪ್ರತ್ಯಕ್ಷಾಶ್ವಾಸಃ। ಮಾಧ್ವಸಂಪ್ರದಾಯೇ ಅಯಂ ಗೀತಾಶಾಸ್ತ್ರಸ್ಯ ಶಿರೋಭೂತಃ ಶ್ಲೋಕಃ।</a:t>
+              <a:t>"à²…à²¹à²‚ à²¤à³à²µà²¾ à²¸à²°à³à²µà²ªà²¾à²ªà³‡à²­à³à²¯à³‹ à²®à³‹à²•à³à²·à²¯à²¿à²·à³à²¯à²¾à²®à²¿ à²®à²¾ à²¶à³à²šà²ƒ" â€” à²…à²·à³à²Ÿà²¾à²¦à²¶à²¾à²§à³à²¯à²¾à²¯à³‡ à²•à³ƒà²·à³à²£à²¸à³à²¯ à²ªà³à²°à²¤à³à²¯à²•à³à²·à²¾à²¶à³à²µà²¾à²¸à²ƒà¥¤ à²®à²¾à²§à³…</a:t>
             </a:r>
             <a:endParaRPr lang="en-US" sz="1050" dirty="0"/>
           </a:p>
@@ -6352,7 +6352,7 @@
                 <a:ea typeface="Tiro Kannada" pitchFamily="34" charset="-122"/>
                 <a:cs typeface="Tiro Kannada" pitchFamily="34" charset="-120"/>
               </a:rPr>
-              <a:t>ಸಾಲೋಕ್ಯಮ್</a:t>
+              <a:t>à²¸à²¾à²²à³‹à²•à³à²¯à²®à³</a:t>
             </a:r>
             <a:endParaRPr lang="en-US" sz="1300" dirty="0"/>
           </a:p>
@@ -6391,7 +6391,7 @@
                 <a:ea typeface="Cormorant Garamond" pitchFamily="34" charset="-122"/>
                 <a:cs typeface="Cormorant Garamond" pitchFamily="34" charset="-120"/>
               </a:rPr>
-              <a:t>BG 8.21 · 15.6</a:t>
+              <a:t>BG 8.21 Â· 15.6</a:t>
             </a:r>
             <a:endParaRPr lang="en-US" sz="950" dirty="0"/>
           </a:p>
@@ -6433,7 +6433,7 @@
                 <a:ea typeface="Tiro Kannada" pitchFamily="34" charset="-122"/>
                 <a:cs typeface="Tiro Kannada" pitchFamily="34" charset="-120"/>
               </a:rPr>
-              <a:t>ಮೋಕ್ಷಸ್ಯ ಪ್ರಥಮಂ ತಾರತಮ್ಯಮ್ — ಹರೇಃ ವೈಕುಂಠಲೋಕೇ ನಿವಾಸಃ, ಪರಂ ನ ತತ್ಸಾನ್ನಿಧ್ಯಮ್।</a:t>
+              <a:t>à²®à³‹à²•à³à²·à²¸à³à²¯ à²ªà³à²°à²¥à²®à²‚ à²¤à²¾à²°à²¤à²®à³à²¯à²®à³ â€” à²¹à²°à³‡à²ƒ à²µà³ˆà²•à³à²‚à² à²²à³‹à²•à³‡ à²¨à²¿à²µà²¾à²¸à²ƒ, à²ªà²°à²‚ à²¨ à²¤à²¤à³à²¸à²¾à²¨à³à²¨à²¿à²§à³à²¯à²®à³à¥¤</a:t>
             </a:r>
             <a:endParaRPr lang="en-US" sz="1050" dirty="0"/>
           </a:p>
@@ -6522,7 +6522,7 @@
                 <a:ea typeface="Tiro Kannada" pitchFamily="34" charset="-122"/>
                 <a:cs typeface="Tiro Kannada" pitchFamily="34" charset="-120"/>
               </a:rPr>
-              <a:t>ಸಾಮೀಪ್ಯಮ್</a:t>
+              <a:t>à²¸à²¾à²®à³€à²ªà³à²¯à²®à³</a:t>
             </a:r>
             <a:endParaRPr lang="en-US" sz="1300" dirty="0"/>
           </a:p>
@@ -6603,7 +6603,7 @@
                 <a:ea typeface="Tiro Kannada" pitchFamily="34" charset="-122"/>
                 <a:cs typeface="Tiro Kannada" pitchFamily="34" charset="-120"/>
               </a:rPr>
-              <a:t>ದ್ವಿತೀಯಂ ತಾರತಮ್ಯಮ್ — ಹರೇಃ ಸ್ವಧಾಮ್ನಿ ತತ್ಸಾನ್ನಿಧ್ಯಪ್ರಾಪ್ತಿಃ। ಸಾಲೋಕ್ಯಾದುತ್ತರಂ ಸಾರೂಪ್ಯಾತ್ ನ್ಯೂನಮ್।</a:t>
+              <a:t>à²¦à³à²µà²¿à²¤à³€à²¯à²‚ à²¤à²¾à²°à²¤à²®à³à²¯à²®à³ â€” à²¹à²°à³‡à²ƒ à²¸à³à²µà²§à²¾à²®à³à²¨à²¿ à²¤à²¤à³à²¸à²¾à²¨à³à²¨à²¿à²§à³à²¯à²ªà³à²°à²¾à²ªà³à²¤à²¿à²ƒà¥¤ à²¸à²¾à²²à³‹à²•à³à²¯à²¾à²¦à³à²¤à³à²¤à²°à²‚ à²¸à²¾à²°à³‚à²ªà³à²¯à²¾à²¤à³ à²¨à³à²¯à³‚à²¨à…</a:t>
             </a:r>
             <a:endParaRPr lang="en-US" sz="1050" dirty="0"/>
           </a:p>
@@ -6713,7 +6713,7 @@
                 <a:ea typeface="Tiro Kannada" pitchFamily="34" charset="-122"/>
                 <a:cs typeface="Tiro Kannada" pitchFamily="34" charset="-120"/>
               </a:rPr>
-              <a:t>ಯಜ್ಞ</a:t>
+              <a:t>à²¯à²œà³à²ž</a:t>
             </a:r>
             <a:endParaRPr lang="en-US" sz="3000" dirty="0"/>
           </a:p>
@@ -6844,7 +6844,7 @@
                 <a:ea typeface="Tiro Kannada" pitchFamily="34" charset="-122"/>
                 <a:cs typeface="Tiro Kannada" pitchFamily="34" charset="-120"/>
               </a:rPr>
-              <a:t>ದ್ರವ್ಯಯಜ್ಞಃ</a:t>
+              <a:t>à²¦à³à²°à²µà³à²¯à²¯à²œà³à²žà²ƒ</a:t>
             </a:r>
             <a:endParaRPr lang="en-US" sz="1300" dirty="0"/>
           </a:p>
@@ -6925,7 +6925,7 @@
                 <a:ea typeface="Tiro Kannada" pitchFamily="34" charset="-122"/>
                 <a:cs typeface="Tiro Kannada" pitchFamily="34" charset="-120"/>
               </a:rPr>
-              <a:t>ಧನ-ವಸ್ತ್ವ-ಅನ್ನಾದಿದ್ರವ್ಯಾರ್ಪಣರೂಪಃ ಯಜ್ಞಃ — ಚತುರ್ಥಾಧ್ಯಾಯಾಷ್ಟಾವಿಂಶೇ ಶ್ಲೋಕೇ ಕೃಷ್ಣೋಕ್ತಯಜ್ಞಾನಾಂ ಪ್ರಥಮಃ।</a:t>
+              <a:t>à²§à²¨-à²µà²¸à³à²¤à³à²µ-à²…à²¨à³à²¨à²¾à²¦à²¿à²¦à³à²°à²µà³à²¯à²¾à²°à³à²ªà²£à²°à³‚à²ªà²ƒ à²¯à²œà³à²žà²ƒ â€” à²šà²¤à³à²°à³à²¥à²¾à²§à³à²¯à²¾à²¯à²¾à²·à³à²Ÿà²¾à²µà²¿à²‚à²¶à³‡ à²¶à³à²²à³‹à²•à³‡ à²•à³ƒà²·à³à²£à³‹à²•à³à²¤à²¯à²œà³à²žà²¾à²¨à²¾à²‚ à²ªà³à…</a:t>
             </a:r>
             <a:endParaRPr lang="en-US" sz="1050" dirty="0"/>
           </a:p>
@@ -7014,7 +7014,7 @@
                 <a:ea typeface="Tiro Kannada" pitchFamily="34" charset="-122"/>
                 <a:cs typeface="Tiro Kannada" pitchFamily="34" charset="-120"/>
               </a:rPr>
-              <a:t>ತಪೋಯಜ್ಞಃ</a:t>
+              <a:t>à²¤à²ªà³‹à²¯à²œà³à²žà²ƒ</a:t>
             </a:r>
             <a:endParaRPr lang="en-US" sz="1300" dirty="0"/>
           </a:p>
@@ -7095,7 +7095,7 @@
                 <a:ea typeface="Tiro Kannada" pitchFamily="34" charset="-122"/>
                 <a:cs typeface="Tiro Kannada" pitchFamily="34" charset="-120"/>
               </a:rPr>
-              <a:t>ಕಾಯಿಕ-ವಾಚಿಕ-ಮಾನಸತಪಸಾಂ ಹರಯೇಽರ್ಪಣರೂಪಃ ಯಜ್ಞಃ।</a:t>
+              <a:t>à²•à²¾à²¯à²¿à²•-à²µà²¾à²šà²¿à²•-à²®à²¾à²¨à²¸à²¤à²ªà²¸à²¾à²‚ à²¹à²°à²¯à³‡à²½à²°à³à²ªà²£à²°à³‚à²ªà²ƒ à²¯à²œà³à²žà²ƒà¥¤</a:t>
             </a:r>
             <a:endParaRPr lang="en-US" sz="1050" dirty="0"/>
           </a:p>
@@ -7184,7 +7184,7 @@
                 <a:ea typeface="Tiro Kannada" pitchFamily="34" charset="-122"/>
                 <a:cs typeface="Tiro Kannada" pitchFamily="34" charset="-120"/>
               </a:rPr>
-              <a:t>ಯೋಗಯಜ್ಞಃ</a:t>
+              <a:t>à²¯à³‹à²—à²¯à²œà³à²žà²ƒ</a:t>
             </a:r>
             <a:endParaRPr lang="en-US" sz="1300" dirty="0"/>
           </a:p>
@@ -7223,7 +7223,7 @@
                 <a:ea typeface="Cormorant Garamond" pitchFamily="34" charset="-122"/>
                 <a:cs typeface="Cormorant Garamond" pitchFamily="34" charset="-120"/>
               </a:rPr>
-              <a:t>BG 4.28–30</a:t>
+              <a:t>BG 4.28â€“30</a:t>
             </a:r>
             <a:endParaRPr lang="en-US" sz="950" dirty="0"/>
           </a:p>
@@ -7265,7 +7265,7 @@
                 <a:ea typeface="Tiro Kannada" pitchFamily="34" charset="-122"/>
                 <a:cs typeface="Tiro Kannada" pitchFamily="34" charset="-120"/>
               </a:rPr>
-              <a:t>ಪ್ರಾಣಾಪಾನಸಂಯಮ-ಅಷ್ಟಾಂಗಯೋಗಾದಿರೂಪಸ್ಯ ಯೋಗಾನುಷ್ಠಾನಸ್ಯ ಹರಯೇ ಅರ್ಪಣಮ್ — ಏಷ ಯೋಗಯಜ್ಞಃ।</a:t>
+              <a:t>à²ªà³à²°à²¾à²£à²¾à²ªà²¾à²¨à²¸à²‚à²¯à²®-à²…à²·à³à²Ÿà²¾à²‚à²—à²¯à³‹à²—à²¾à²¦à²¿à²°à³‚à²ªà²¸à³à²¯ à²¯à³‹à²—à²¾à²¨à³à²·à³à² à²¾à²¨à²¸à³à²¯ à²¹à²°à²¯à³‡ à²…à²°à³à²ªà²£à²®à³ â€” à²à²· à²¯à³‹à²—à²¯à²œà³à²žà²ƒà¥¤</a:t>
             </a:r>
             <a:endParaRPr lang="en-US" sz="1050" dirty="0"/>
           </a:p>
@@ -7354,7 +7354,7 @@
                 <a:ea typeface="Tiro Kannada" pitchFamily="34" charset="-122"/>
                 <a:cs typeface="Tiro Kannada" pitchFamily="34" charset="-120"/>
               </a:rPr>
-              <a:t>ಸ್ವಾಧ್ಯಾಯ-ಜ್ಞಾನ-ಯಜ್ಞಃ</a:t>
+              <a:t>à²¸à³à²µà²¾à²§à³à²¯à²¾à²¯-à²œà³à²žà²¾à²¨-à²¯à²œà³à²žà²ƒ</a:t>
             </a:r>
             <a:endParaRPr lang="en-US" sz="1300" dirty="0"/>
           </a:p>
@@ -7435,7 +7435,7 @@
                 <a:ea typeface="Tiro Kannada" pitchFamily="34" charset="-122"/>
                 <a:cs typeface="Tiro Kannada" pitchFamily="34" charset="-120"/>
               </a:rPr>
-              <a:t>ಶಾಸ್ತ್ರಸ್ವಾಧ್ಯಾಯಃ ತದುಕ್ತಾರ್ಥಜ್ಞಾನಸಹಿತಃ — ವಾಙ್ಮಯೇಷು ಯಜ್ಞೇಷು ಉತ್ತಮಃ।</a:t>
+              <a:t>à²¶à²¾à²¸à³à²¤à³à²°à²¸à³à²µà²¾à²§à³à²¯à²¾à²¯à²ƒ à²¤à²¦à³à²•à³à²¤à²¾à²°à³à²¥à²œà³à²žà²¾à²¨à²¸à²¹à²¿à²¤à²ƒ â€” à²µà²¾à²™à³à²®à²¯à³‡à²·à³ à²¯à²œà³à²žà³‡à²·à³ à²‰à²¤à³à²¤à²®à²ƒà¥¤</a:t>
             </a:r>
             <a:endParaRPr lang="en-US" sz="1050" dirty="0"/>
           </a:p>
@@ -7545,7 +7545,7 @@
                 <a:ea typeface="Tiro Kannada" pitchFamily="34" charset="-122"/>
                 <a:cs typeface="Tiro Kannada" pitchFamily="34" charset="-120"/>
               </a:rPr>
-              <a:t>ಪ್ರತೀಕ</a:t>
+              <a:t>à²ªà³à²°à²¤à³€à²•</a:t>
             </a:r>
             <a:endParaRPr lang="en-US" sz="3000" dirty="0"/>
           </a:p>
@@ -7676,7 +7676,7 @@
                 <a:ea typeface="Tiro Kannada" pitchFamily="34" charset="-122"/>
                 <a:cs typeface="Tiro Kannada" pitchFamily="34" charset="-120"/>
               </a:rPr>
-              <a:t>ಅಶ್ವತ್ಥವೃಕ್ಷಃ</a:t>
+              <a:t>à²…à²¶à³à²µà²¤à³à²¥à²µà³ƒà²•à³à²·à²ƒ</a:t>
             </a:r>
             <a:endParaRPr lang="en-US" sz="1300" dirty="0"/>
           </a:p>
@@ -7715,7 +7715,7 @@
                 <a:ea typeface="Cormorant Garamond" pitchFamily="34" charset="-122"/>
                 <a:cs typeface="Cormorant Garamond" pitchFamily="34" charset="-120"/>
               </a:rPr>
-              <a:t>BG 15.1–3</a:t>
+              <a:t>BG 15.1â€“3</a:t>
             </a:r>
             <a:endParaRPr lang="en-US" sz="950" dirty="0"/>
           </a:p>
@@ -7757,7 +7757,7 @@
                 <a:ea typeface="Tiro Kannada" pitchFamily="34" charset="-122"/>
                 <a:cs typeface="Tiro Kannada" pitchFamily="34" charset="-120"/>
               </a:rPr>
-              <a:t>ಊರ್ಧ್ವಮೂಲಃ (ಹರಿಃ) ಅಧಃಶಾಖಃ (ಲೋಕಾಃ) ಸಂಸಾರವೃಕ್ಷಃ — ಗುಣೈಃ ಸಿಕ್ತಃ, ವಿಷಯಾಂಕುರೋಪೇತಃ, ಅಸಂಗಶಸ್ತ್ರೇಣ ಛೇದ್ಯಃ।</a:t>
+              <a:t>à²Šà²°à³à²§à³à²µà²®à³‚à²²à²ƒ (à²¹à²°à²¿à²ƒ) à²…à²§à²ƒà²¶à²¾à²–à²ƒ (à²²à³‹à²•à²¾à²ƒ) à²¸à²‚à²¸à²¾à²°à²µà³ƒà²•à³à²·à²ƒ â€” à²—à³à²£à³ˆà²ƒ à²¸à²¿à²•à³à²¤à²ƒ, à²µà²¿à²·à²¯à²¾à²‚à²•à³à²°à³‹à²ªà³‡à²¤à²ƒ, à²…à²¸à²‚à²—à²¶à²¸à³à²¤à³à²°à³‡à²£ à²›à³‡à²¦à³à²¯à²…</a:t>
             </a:r>
             <a:endParaRPr lang="en-US" sz="1050" dirty="0"/>
           </a:p>
@@ -7846,7 +7846,7 @@
                 <a:ea typeface="Tiro Kannada" pitchFamily="34" charset="-122"/>
                 <a:cs typeface="Tiro Kannada" pitchFamily="34" charset="-120"/>
               </a:rPr>
-              <a:t>ರಥರೂಪಕಮ್</a:t>
+              <a:t>à²°à²¥à²°à³‚à²ªà²•à²®à³</a:t>
             </a:r>
             <a:endParaRPr lang="en-US" sz="1300" dirty="0"/>
           </a:p>
@@ -7885,7 +7885,7 @@
                 <a:ea typeface="Cormorant Garamond" pitchFamily="34" charset="-122"/>
                 <a:cs typeface="Cormorant Garamond" pitchFamily="34" charset="-120"/>
               </a:rPr>
-              <a:t>BG 1.21–25 · 18.78</a:t>
+              <a:t>BG 1.21â€“25 Â· 18.78</a:t>
             </a:r>
             <a:endParaRPr lang="en-US" sz="950" dirty="0"/>
           </a:p>
@@ -7927,7 +7927,7 @@
                 <a:ea typeface="Tiro Kannada" pitchFamily="34" charset="-122"/>
                 <a:cs typeface="Tiro Kannada" pitchFamily="34" charset="-120"/>
               </a:rPr>
-              <a:t>ಪ್ರಥಮದ್ವಿತೀಯಾಧ್ಯಾಯಯೋಃ ಸೂಚಿತಮ್ — ಕೃಷ್ಣಃ ಸಾರಥಿಃ, ಅರ್ಜುನೋ ರಥೀ। ಕಠೋಪನಿಷದುಕ್ತರಥರೂಪಕಸ್ಯ ಪ್ರತಿಧ್ವನಿಃ।</a:t>
+              <a:t>à²ªà³à²°à²¥à²®à²¦à³à²µà²¿à²¤à³€à²¯à²¾à²§à³à²¯à²¾à²¯à²¯à³‹à²ƒ à²¸à³‚à²šà²¿à²¤à²®à³ â€” à²•à³ƒà²·à³à²£à²ƒ à²¸à²¾à²°à²¥à²¿à²ƒ, à²…à²°à³à²œà³à²¨à³‹ à²°à²¥à³€à¥¤ à²•à² à³‹à²ªà²¨à²¿à²·à²¦à³à²•à³à²¤à²°à²¥à²°à³‚à²ªà²•à²¸à³à²¯ à²ªà³à²°à²¤à²¿à²§à³à²µà²¨à²¿…</a:t>
             </a:r>
             <a:endParaRPr lang="en-US" sz="1050" dirty="0"/>
           </a:p>
@@ -8016,7 +8016,7 @@
                 <a:ea typeface="Tiro Kannada" pitchFamily="34" charset="-122"/>
                 <a:cs typeface="Tiro Kannada" pitchFamily="34" charset="-120"/>
               </a:rPr>
-              <a:t>ಪ್ರಣವಃ (ಓಂ)</a:t>
+              <a:t>à²ªà³à²°à²£à²µà²ƒ (à²“à²‚)</a:t>
             </a:r>
             <a:endParaRPr lang="en-US" sz="1300" dirty="0"/>
           </a:p>
@@ -8055,7 +8055,7 @@
                 <a:ea typeface="Cormorant Garamond" pitchFamily="34" charset="-122"/>
                 <a:cs typeface="Cormorant Garamond" pitchFamily="34" charset="-120"/>
               </a:rPr>
-              <a:t>BG 8.13 · 17.23</a:t>
+              <a:t>BG 8.13 Â· 17.23</a:t>
             </a:r>
             <a:endParaRPr lang="en-US" sz="950" dirty="0"/>
           </a:p>
@@ -8097,7 +8097,7 @@
                 <a:ea typeface="Tiro Kannada" pitchFamily="34" charset="-122"/>
                 <a:cs typeface="Tiro Kannada" pitchFamily="34" charset="-120"/>
               </a:rPr>
-              <a:t>"ಓಂ ಇತ್ಯೇಕಾಕ್ಷರಂ ಬ್ರಹ್ಮ" — ಅಂತಕಾಲೇ ಓಂಕಾರಮುಚ್ಚಾರಯನ್ ಹರಿಮನುಸ್ಮರನ್ ಪರಮಾಂ ಗತಿಂ ಪ್ರಾಪ್ನೋತಿ।</a:t>
+              <a:t>"à²“à²‚ à²‡à²¤à³à²¯à³‡à²•à²¾à²•à³à²·à²°à²‚ à²¬à³à²°à²¹à³à²®" â€” à²…à²‚à²¤à²•à²¾à²²à³‡ à²“à²‚à²•à²¾à²°à²®à³à²šà³à²šà²¾à²°à²¯à²¨à³ à²¹à²°à²¿à²®à²¨à³à²¸à³à²®à²°à²¨à³ à²ªà²°à²®à²¾à²‚ à²—à²¤à²¿à²‚ à²ªà³à²°à²¾à²ªà³à²¨à³‹à²¤à²¿à¥¤</a:t>
             </a:r>
             <a:endParaRPr lang="en-US" sz="1050" dirty="0"/>
           </a:p>
@@ -8186,7 +8186,7 @@
                 <a:ea typeface="Tiro Kannada" pitchFamily="34" charset="-122"/>
                 <a:cs typeface="Tiro Kannada" pitchFamily="34" charset="-120"/>
               </a:rPr>
-              <a:t>ಅಕ್ಷರಾಣಾಮಕಾರಃ</a:t>
+              <a:t>à²…à²•à³à²·à²°à²¾à²£à²¾à²®à²•à²¾à²°à²ƒ</a:t>
             </a:r>
             <a:endParaRPr lang="en-US" sz="1300" dirty="0"/>
           </a:p>
@@ -8267,7 +8267,7 @@
                 <a:ea typeface="Tiro Kannada" pitchFamily="34" charset="-122"/>
                 <a:cs typeface="Tiro Kannada" pitchFamily="34" charset="-120"/>
               </a:rPr>
-              <a:t>"ಅಕ್ಷರಾಣಾಮಕಾರೋಽಸ್ಮಿ" — ಸರ್ವವರ್ಣಾನಾಂ ಮೂಲಭೂತಃ ಅಕಾರಃ ಅಹಮ್ ಇತಿ ಕೃಷ್ಣವಚನಮ್; ಸಮಾಸೇಷು ದ್ವಂದ್ವಸಮಾಸಶ್ಚ।</a:t>
+              <a:t>"à²…à²•à³à²·à²°à²¾à²£à²¾à²®à²•à²¾à²°à³‹à²½à²¸à³à²®à²¿" â€” à²¸à²°à³à²µà²µà²°à³à²£à²¾à²¨à²¾à²‚ à²®à³‚à²²à²­à³‚à²¤à²ƒ à²…à²•à²¾à²°à²ƒ à²…à²¹à²®à³ à²‡à²¤à²¿ à²•à³ƒà²·à³à²£à²µà²šà²¨à²®à³; à²¸à²®à²¾à²¸à³‡à²·à³ à²¦à³à²µà²‚à²¦à³à²µà²¸à²®à²¾à²¸à²¶à³à²šà¥¤</a:t>
             </a:r>
             <a:endParaRPr lang="en-US" sz="1050" dirty="0"/>
           </a:p>
@@ -9144,7 +9144,7 @@
                 <a:ea typeface="Tiro Kannada" pitchFamily="34" charset="-122"/>
                 <a:cs typeface="Tiro Kannada" pitchFamily="34" charset="-120"/>
               </a:rPr>
-              <a:t>ಪರಮಾರ್ಥ</a:t>
+              <a:t>à²ªà²°à²®à²¾à²°à³à²¥</a:t>
             </a:r>
             <a:endParaRPr lang="en-US" sz="800" dirty="0"/>
           </a:p>
@@ -9433,7 +9433,7 @@
                 <a:ea typeface="Tiro Kannada" pitchFamily="34" charset="-122"/>
                 <a:cs typeface="Tiro Kannada" pitchFamily="34" charset="-120"/>
               </a:rPr>
-              <a:t>ತತ್ತ್ವ</a:t>
+              <a:t>à²¤à²¤à³à²¤à³à²µ</a:t>
             </a:r>
             <a:endParaRPr lang="en-US" sz="800" dirty="0"/>
           </a:p>
@@ -9672,7 +9672,7 @@
                 <a:ea typeface="Tiro Kannada" pitchFamily="34" charset="-122"/>
                 <a:cs typeface="Tiro Kannada" pitchFamily="34" charset="-120"/>
               </a:rPr>
-              <a:t>ಕ್ಷೇತ್ರ-ಕ್ಷೇತ್ರಜ್ಞ</a:t>
+              <a:t>à²•à³à²·à³‡à²¤à³à²°-à²•à³à²·à³‡à²¤à³à²°à²œà³à²ž</a:t>
             </a:r>
             <a:endParaRPr lang="en-US" sz="800" dirty="0"/>
           </a:p>
@@ -9911,7 +9911,7 @@
                 <a:ea typeface="Tiro Kannada" pitchFamily="34" charset="-122"/>
                 <a:cs typeface="Tiro Kannada" pitchFamily="34" charset="-120"/>
               </a:rPr>
-              <a:t>ಗುಣ</a:t>
+              <a:t>à²—à³à²£</a:t>
             </a:r>
             <a:endParaRPr lang="en-US" sz="800" dirty="0"/>
           </a:p>
@@ -10200,7 +10200,7 @@
                 <a:ea typeface="Tiro Kannada" pitchFamily="34" charset="-122"/>
                 <a:cs typeface="Tiro Kannada" pitchFamily="34" charset="-120"/>
               </a:rPr>
-              <a:t>ಯೋಗ</a:t>
+              <a:t>à²¯à³‹à²—</a:t>
             </a:r>
             <a:endParaRPr lang="en-US" sz="800" dirty="0"/>
           </a:p>
@@ -10464,7 +10464,7 @@
                 <a:ea typeface="Tiro Kannada" pitchFamily="34" charset="-122"/>
                 <a:cs typeface="Tiro Kannada" pitchFamily="34" charset="-120"/>
               </a:rPr>
-              <a:t>ಸಾಧನಾ</a:t>
+              <a:t>à²¸à²¾à²§à²¨à²¾</a:t>
             </a:r>
             <a:endParaRPr lang="en-US" sz="800" dirty="0"/>
           </a:p>
@@ -10753,7 +10753,7 @@
                 <a:ea typeface="Tiro Kannada" pitchFamily="34" charset="-122"/>
                 <a:cs typeface="Tiro Kannada" pitchFamily="34" charset="-120"/>
               </a:rPr>
-              <a:t>ಅಂತಃಕರಣ</a:t>
+              <a:t>à²…à²‚à²¤à²ƒà²•à²°à²£</a:t>
             </a:r>
             <a:endParaRPr lang="en-US" sz="800" dirty="0"/>
           </a:p>
@@ -10942,7 +10942,7 @@
                 <a:ea typeface="Tiro Kannada" pitchFamily="34" charset="-122"/>
                 <a:cs typeface="Tiro Kannada" pitchFamily="34" charset="-120"/>
               </a:rPr>
-              <a:t>ಧರ್ಮ</a:t>
+              <a:t>à²§à²°à³à²®</a:t>
             </a:r>
             <a:endParaRPr lang="en-US" sz="800" dirty="0"/>
           </a:p>
@@ -11206,7 +11206,7 @@
                 <a:ea typeface="Tiro Kannada" pitchFamily="34" charset="-122"/>
                 <a:cs typeface="Tiro Kannada" pitchFamily="34" charset="-120"/>
               </a:rPr>
-              <a:t>ದೋಷ</a:t>
+              <a:t>à²¦à³‹à²·</a:t>
             </a:r>
             <a:endParaRPr lang="en-US" sz="800" dirty="0"/>
           </a:p>
@@ -11445,7 +11445,7 @@
                 <a:ea typeface="Tiro Kannada" pitchFamily="34" charset="-122"/>
                 <a:cs typeface="Tiro Kannada" pitchFamily="34" charset="-120"/>
               </a:rPr>
-              <a:t>ಫಲ</a:t>
+              <a:t>à²«à²²</a:t>
             </a:r>
             <a:endParaRPr lang="en-US" sz="800" dirty="0"/>
           </a:p>
@@ -11734,7 +11734,7 @@
                 <a:ea typeface="Tiro Kannada" pitchFamily="34" charset="-122"/>
                 <a:cs typeface="Tiro Kannada" pitchFamily="34" charset="-120"/>
               </a:rPr>
-              <a:t>ಯಜ್ಞ</a:t>
+              <a:t>à²¯à²œà³à²ž</a:t>
             </a:r>
             <a:endParaRPr lang="en-US" sz="800" dirty="0"/>
           </a:p>
@@ -11923,7 +11923,7 @@
                 <a:ea typeface="Tiro Kannada" pitchFamily="34" charset="-122"/>
                 <a:cs typeface="Tiro Kannada" pitchFamily="34" charset="-120"/>
               </a:rPr>
-              <a:t>ಪ್ರತೀಕ</a:t>
+              <a:t>à²ªà³à²°à²¤à³€à²•</a:t>
             </a:r>
             <a:endParaRPr lang="en-US" sz="800" dirty="0"/>
           </a:p>
@@ -12183,7 +12183,7 @@
                 <a:ea typeface="Tiro Kannada" pitchFamily="34" charset="-122"/>
                 <a:cs typeface="Tiro Kannada" pitchFamily="34" charset="-120"/>
               </a:rPr>
-              <a:t>ಸರ್ವೋತ್ತಮತ್ವ — ಹರಿಯ</a:t>
+              <a:t>à²¸à²°à³à²µà³‹à²¤à³à²¤à²®à²¤à³à²µ â€” à²¹à²°à²¿à²¯</a:t>
             </a:r>
             <a:endParaRPr lang="en-US" sz="3000" dirty="0"/>
           </a:p>
@@ -12225,7 +12225,7 @@
                 <a:ea typeface="Tiro Kannada" pitchFamily="34" charset="-122"/>
                 <a:cs typeface="Tiro Kannada" pitchFamily="34" charset="-120"/>
               </a:rPr>
-              <a:t>ತಾರತಮ್ಯದ ಮೂಲಾಧಾರ-ಸಿದ್ಧಾಂತ — ಹರಿಯು ಸರ್ವೋತ್ಕೃಷ್ಟ, ಅವನಿಗೆ ಸಮಾನನಿಲ್ಲ ಅಧಿಕನಿಲ್ಲ. ಎಲ್ಲವೂ ಇತರ ಅವನ ಪರತಂತ್ರ.</a:t>
+              <a:t>à²¤à²¾à²°à²¤à²®à³à²¯à²¦ à²®à³‚à²²à²¾à²§à²¾à²°-à²¸à²¿à²¦à³à²§à²¾à²‚à²¤ â€” à²¹à²°à²¿à²¯à³ à²¸à²°à³à²µà³‹à²¤à³à²•à³ƒà²·à³à²Ÿ, à²…à²µà²¨à²¿à²—à³† à²¸à²®à²¾à²¨à²¨à²¿à²²à³à²² à²…à²§à²¿à²•à²¨à²¿à²²à³à²². à²Žà²²à³à²²à²µà³‚ à²‡à²¤à²° à²…à²µà²¨ à²ªà²°à²¤à²‚à²¤à³à²°.</a:t>
             </a:r>
             <a:endParaRPr lang="en-US" sz="1300" dirty="0"/>
           </a:p>
@@ -12267,7 +12267,7 @@
                 <a:ea typeface="Tiro Kannada" pitchFamily="34" charset="-122"/>
                 <a:cs typeface="Tiro Kannada" pitchFamily="34" charset="-120"/>
               </a:rPr>
-              <a:t>ಮಧ್ವ-ಸಿದ್ಧಾಂತದ ಆಧಾರ-ಶಿಲೆ — ಪಂಚ-ಭೇದ-ವ್ಯವಸ್ಥೆಯು ಇದರಿಂದಲೇ ಪ್ರಾರಂಭವಾಗುತ್ತದೆ.</a:t>
+              <a:t>à²®à²§à³à²µ-à²¸à²¿à²¦à³à²§à²¾à²‚à²¤à²¦ à²†à²§à²¾à²°-à²¶à²¿à²²à³† â€” à²ªà²‚à²š-à²­à³‡à²¦-à²µà³à²¯à²µà²¸à³à²¥à³†à²¯à³ à²‡à²¦à²°à²¿à²‚à²¦à²²à³‡ à²ªà³à²°à²¾à²°à²‚à²­à²µà²¾à²—à³à²¤à³à²¤à²¦à³†.</a:t>
             </a:r>
             <a:endParaRPr lang="en-US" sz="1300" dirty="0"/>
           </a:p>
@@ -12437,7 +12437,7 @@
                 <a:ea typeface="Tiro Kannada" pitchFamily="34" charset="-122"/>
                 <a:cs typeface="Tiro Kannada" pitchFamily="34" charset="-120"/>
               </a:rPr>
-              <a:t>ಮತ್ತಃ ಪರತರಂ ನಾನ್ಯತ್ಕಿಂಚಿದಸ್ತಿ ಧನಂಜಯ।</a:t>
+              <a:t>à²®à²¤à³à²¤à²ƒ à²ªà²°à²¤à²°à²‚ à²¨à²¾à²¨à³à²¯à²¤à³à²•à²¿à²‚à²šà²¿à²¦à²¸à³à²¤à²¿ à²§à²¨à²‚à²œà²¯à¥¤</a:t>
             </a:r>
             <a:endParaRPr lang="en-US" sz="1200" dirty="0"/>
           </a:p>
@@ -12476,7 +12476,7 @@
                 <a:ea typeface="Cormorant Garamond" pitchFamily="34" charset="-122"/>
                 <a:cs typeface="Cormorant Garamond" pitchFamily="34" charset="-120"/>
               </a:rPr>
-              <a:t>BG 7.7 · 11.43 · 18.65</a:t>
+              <a:t>BG 7.7 Â· 11.43 Â· 18.65</a:t>
             </a:r>
             <a:endParaRPr lang="en-US" sz="1000" dirty="0"/>
           </a:p>
@@ -12586,7 +12586,7 @@
                 <a:ea typeface="Tiro Kannada" pitchFamily="34" charset="-122"/>
                 <a:cs typeface="Tiro Kannada" pitchFamily="34" charset="-120"/>
               </a:rPr>
-              <a:t>ಪಂಚಭೇದ — ಐದು ವಾಸ್ತವಿಕ ಭೇದಗಳು</a:t>
+              <a:t>à²ªà²‚à²šà²­à³‡à²¦ â€” à²à²¦à³ à²µà²¾à²¸à³à²¤à²µà²¿à²• à²­à³‡à²¦à²—à²³à³</a:t>
             </a:r>
             <a:endParaRPr lang="en-US" sz="3000" dirty="0"/>
           </a:p>
@@ -12628,7 +12628,7 @@
                 <a:ea typeface="Tiro Kannada" pitchFamily="34" charset="-122"/>
                 <a:cs typeface="Tiro Kannada" pitchFamily="34" charset="-120"/>
               </a:rPr>
-              <a:t>ಹರಿ-ಜೀವ, ಹರಿ-ಜಡ, ಜೀವ-ಜಡ, ಜೀವ-ಜೀವ, ಜಡ-ಜಡ — ಈ ಐದು ನಿತ್ಯ-ಭೇದಗಳು ಮಧ್ವ-ಸಿದ್ಧಾಂತದಿಂದ ಸತ್ತಾ-ತಂತ್ರ-ವಾಸ್ತವಿಕ ಎಂದು ಪ್ರತಿಪಾದ್ಯವಾಗುತ್ತವೆ.</a:t>
+              <a:t>à²¹à²°à²¿-à²œà³€à²µ, à²¹à²°à²¿-à²œà²¡, à²œà³€à²µ-à²œà²¡, à²œà³€à²µ-à²œà³€à²µ, à²œà²¡-à²œà²¡ â€” à²ˆ à²à²¦à³ à²¨à²¿à²¤à³à²¯-à²­à³‡à²¦à²—à²³à³ à²®à²§à³à²µ-à²¸à²¿à²¦à³à²§à²¾à²‚à²¤à²¦à²¿à²‚à²¦ à²¸à²¤à³à²¤à²¾-à²¤à²‚à²¤à³à²°-à²µà²¾à²¸à³à²¤à²µà²¿à²• à²Žà²‚à²¦à³ à²ªà³à²°à²¤à²¿à²ªà²¾à²¦à³à²¯à²µà²¾à²—à³à²¤à³à²¤à²µà³†.</a:t>
             </a:r>
             <a:endParaRPr lang="en-US" sz="1300" dirty="0"/>
           </a:p>
@@ -12670,7 +12670,7 @@
                 <a:ea typeface="Tiro Kannada" pitchFamily="34" charset="-122"/>
                 <a:cs typeface="Tiro Kannada" pitchFamily="34" charset="-120"/>
               </a:rPr>
-              <a:t>ಮಧ್ವ-ನಿರ್ಣಾಯಕ. ಪ್ರತಿ ಭೇದವೂ ಗೀತೆಯಲ್ಲಿ ಪ್ರತಿಷ್ಠಿತ (ಜೀವಾಂಶ-ವಾಕ್ಯ ಗೀ॰ ೧೫।೭; ಜೀವ-ಜೀವ-ಭೇದ ಸ್ವಭಾವ-ವಾಕ್ಯ ಗೀ॰ ೧೮।೪೧ ಇತ್ಯಾದಿಗಳಲ್ಲಿ ಅಂತರ್ನಿಹಿತ).</a:t>
+              <a:t>à²®à²§à³à²µ-à²¨à²¿à²°à³à²£à²¾à²¯à²•. à²ªà³à²°à²¤à²¿ à²­à³‡à²¦à²µà³‚ à²—à³€à²¤à³†à²¯à²²à³à²²à²¿ à²ªà³à²°à²¤à²¿à²·à³à² à²¿à²¤ (à²œà³€à²µà²¾à²‚à²¶-à²µà²¾à²•à³à²¯ à²—à³€à¥° à³§à³«à¥¤à³­; à²œà³€à²µ-à²œà³€à²µ-à²­à³‡à²¦ à²¸à³à²µà²­à²¾à²µ-à²µà²¾à²•à³à²¯ à²—à³€à¥° à³§à³®à¥¤à³ªà³§ à²‡à²¤à³à²¯à²¾à²¦à²¿à²—à²³à²²à³à²²à²¿ à²…à²‚à²¤à²°à³à²¨à²¿à²¹à²¿à²¤).</a:t>
             </a:r>
             <a:endParaRPr lang="en-US" sz="1300" dirty="0"/>
           </a:p>
@@ -12840,7 +12840,7 @@
                 <a:ea typeface="Tiro Kannada" pitchFamily="34" charset="-122"/>
                 <a:cs typeface="Tiro Kannada" pitchFamily="34" charset="-120"/>
               </a:rPr>
-              <a:t>ಮಮೈವಾಂಶೋ ಜೀವಲೋಕೇ ಜೀವಭೂತಃ ಸನಾತನಃ।</a:t>
+              <a:t>à²®à²®à³ˆà²µà²¾à²‚à²¶à³‹ à²œà³€à²µà²²à³‹à²•à³‡ à²œà³€à²µà²­à³‚à²¤à²ƒ à²¸à²¨à²¾à²¤à²¨à²ƒà¥¤</a:t>
             </a:r>
             <a:endParaRPr lang="en-US" sz="1200" dirty="0"/>
           </a:p>
@@ -12879,7 +12879,7 @@
                 <a:ea typeface="Cormorant Garamond" pitchFamily="34" charset="-122"/>
                 <a:cs typeface="Cormorant Garamond" pitchFamily="34" charset="-120"/>
               </a:rPr>
-              <a:t>BG 7.4–5 · 15.7 · 15.16–18</a:t>
+              <a:t>BG 7.4â€“5 Â· 15.7 Â· 15.16â€“18</a:t>
             </a:r>
             <a:endParaRPr lang="en-US" sz="1000" dirty="0"/>
           </a:p>
@@ -13141,7 +13141,7 @@
                 <a:ea typeface="Tiro Kannada" pitchFamily="34" charset="-122"/>
                 <a:cs typeface="Tiro Kannada" pitchFamily="34" charset="-120"/>
               </a:rPr>
-              <a:t>ತಾರತಮ್ಯ — ಸತ್ತಾ-ಕ್ರಮ</a:t>
+              <a:t>à²¤à²¾à²°à²¤à²®à³à²¯ â€” à²¸à²¤à³à²¤à²¾-à²•à³à²°à²®</a:t>
             </a:r>
             <a:endParaRPr lang="en-US" sz="3000" dirty="0"/>
           </a:p>
@@ -13183,7 +13183,7 @@
                 <a:ea typeface="Tiro Kannada" pitchFamily="34" charset="-122"/>
                 <a:cs typeface="Tiro Kannada" pitchFamily="34" charset="-120"/>
               </a:rPr>
-              <a:t>ಹರಿ-ಅಧೀನ ಸಮಸ್ತ ಸತ್ತೆಯ ಕಠೋರ ಕ್ರಮ-ವ್ಯವಸ್ಥೆ — ಪ್ರತಿ ಜೀವಕ್ಕೂ ನಿಶ್ಚಿತ ಮತ್ತು ಅಪರಿವರ್ತನೀಯ ಪದ-ಕ್ರಮ. ಮಧ್ವ-ತತ್ತ್ವ-ಶಾಸ್ತ್ರದ ರಚನಾ-ತತ್ತ್ವ.</a:t>
+              <a:t>à²¹à²°à²¿-à²…à²§à³€à²¨ à²¸à²®à²¸à³à²¤ à²¸à²¤à³à²¤à³†à²¯ à²•à² à³‹à²° à²•à³à²°à²®-à²µà³à²¯à²µà²¸à³à²¥à³† â€” à²ªà³à²°à²¤à²¿ à²œà³€à²µà²•à³à²•à³‚ à²¨à²¿à²¶à³à²šà²¿à²¤ à²®à²¤à³à²¤à³ à²…à²ªà²°à²¿à²µà²°à³à²¤à²¨à³€à²¯ à²ªà²¦-à²•à³à²°à²®. à²®à²§à³à²µ-à²¤à²¤à³à²¤à³à²µ-à²¶à²¾à²¸à³à²¤à³à²°à²¦ à²°à²šà²¨à²¾-à²¤à²¤à³à²¤à³à²µ.</a:t>
             </a:r>
             <a:endParaRPr lang="en-US" sz="1300" dirty="0"/>
           </a:p>
@@ -13225,7 +13225,7 @@
                 <a:ea typeface="Tiro Kannada" pitchFamily="34" charset="-122"/>
                 <a:cs typeface="Tiro Kannada" pitchFamily="34" charset="-120"/>
               </a:rPr>
-              <a:t>ವಿಶಿಷ್ಟ ಮಧ್ವ-ತತ್ತ್ವ. ಪಂಚ-ಭೇದ-ವ್ಯವಸ್ಥೆ ಮತ್ತು ಮುಕ್ತಿ-ತಾರತಮ್ಯವನ್ನು ಆಧರಿಸುತ್ತದೆ.</a:t>
+              <a:t>à²µà²¿à²¶à²¿à²·à³à²Ÿ à²®à²§à³à²µ-à²¤à²¤à³à²¤à³à²µ. à²ªà²‚à²š-à²­à³‡à²¦-à²µà³à²¯à²µà²¸à³à²¥à³† à²®à²¤à³à²¤à³ à²®à³à²•à³à²¤à²¿-à²¤à²¾à²°à²¤à²®à³à²¯à²µà²¨à³à²¨à³ à²†à²§à²°à²¿à²¸à³à²¤à³à²¤à²¦à³†.</a:t>
             </a:r>
             <a:endParaRPr lang="en-US" sz="1300" dirty="0"/>
           </a:p>
@@ -13395,7 +13395,7 @@
                 <a:ea typeface="Tiro Kannada" pitchFamily="34" charset="-122"/>
                 <a:cs typeface="Tiro Kannada" pitchFamily="34" charset="-120"/>
               </a:rPr>
-              <a:t>ಮತ್ತಃ ಪರತರಂ ನಾನ್ಯತ್ಕಿಂಚಿದಸ್ತಿ ಧನಂಜಯ।</a:t>
+              <a:t>à²®à²¤à³à²¤à²ƒ à²ªà²°à²¤à²°à²‚ à²¨à²¾à²¨à³à²¯à²¤à³à²•à²¿à²‚à²šà²¿à²¦à²¸à³à²¤à²¿ à²§à²¨à²‚à²œà²¯à¥¤</a:t>
             </a:r>
             <a:endParaRPr lang="en-US" sz="1200" dirty="0"/>
           </a:p>
@@ -13415,7 +13415,7 @@
                 <a:ea typeface="Tiro Kannada" pitchFamily="34" charset="-122"/>
                 <a:cs typeface="Tiro Kannada" pitchFamily="34" charset="-120"/>
               </a:rPr>
-              <a:t>ಮಯಿ ಸರ್ವಮಿದಂ ಪ್ರೋತಂ ಸೂತ್ರೇ ಮಣಿಗಣಾ ಇವ॥</a:t>
+              <a:t>à²®à²¯à²¿ à²¸à²°à³à²µà²®à²¿à²¦à²‚ à²ªà³à²°à³‹à²¤à²‚ à²¸à³‚à²¤à³à²°à³‡ à²®à²£à²¿à²—à²£à²¾ à²‡à²µà¥¥</a:t>
             </a:r>
             <a:endParaRPr lang="en-US" sz="1200" dirty="0"/>
           </a:p>
@@ -13454,7 +13454,7 @@
                 <a:ea typeface="Cormorant Garamond" pitchFamily="34" charset="-122"/>
                 <a:cs typeface="Cormorant Garamond" pitchFamily="34" charset="-120"/>
               </a:rPr>
-              <a:t>BG 7.7 · 15.16–18</a:t>
+              <a:t>BG 7.7 Â· 15.16â€“18</a:t>
             </a:r>
             <a:endParaRPr lang="en-US" sz="1000" dirty="0"/>
           </a:p>
@@ -13564,7 +13564,7 @@
                 <a:ea typeface="Tiro Kannada" pitchFamily="34" charset="-122"/>
                 <a:cs typeface="Tiro Kannada" pitchFamily="34" charset="-120"/>
               </a:rPr>
-              <a:t>ಚರಮಶ್ಲೋಕ-ಫಲಮ್</a:t>
+              <a:t>à²šà²°à²®à²¶à³à²²à³‹à²•-à²«à²²à²®à³</a:t>
             </a:r>
             <a:endParaRPr lang="en-US" sz="3000" dirty="0"/>
           </a:p>
@@ -13606,7 +13606,7 @@
                 <a:ea typeface="Tiro Kannada" pitchFamily="34" charset="-122"/>
                 <a:cs typeface="Tiro Kannada" pitchFamily="34" charset="-120"/>
               </a:rPr>
-              <a:t>"ಅಹಂ ತ್ವಾ ಸರ್ವಪಾಪೇಭ್ಯೋ ಮೋಕ್ಷಯಿಷ್ಯಾಮಿ ಮಾ ಶುಚಃ" — ಅಷ್ಟಾದಶಾಧ್ಯಾಯೇ ಕೃಷ್ಣಸ್ಯ ಪ್ರತ್ಯಕ್ಷಾಶ್ವಾಸಃ। ಮಾಧ್ವಸಂಪ್ರದಾಯೇ ಅಯಂ ಗೀತಾಶಾಸ್ತ್ರಸ್ಯ ಶಿರೋಭೂತಃ ಶ್ಲೋಕಃ।</a:t>
+              <a:t>"à²…à²¹à²‚ à²¤à³à²µà²¾ à²¸à²°à³à²µà²ªà²¾à²ªà³‡à²­à³à²¯à³‹ à²®à³‹à²•à³à²·à²¯à²¿à²·à³à²¯à²¾à²®à²¿ à²®à²¾ à²¶à³à²šà²ƒ" â€” à²…à²·à³à²Ÿà²¾à²¦à²¶à²¾à²§à³à²¯à²¾à²¯à³‡ à²•à³ƒà²·à³à²£à²¸à³à²¯ à²ªà³à²°à²¤à³à²¯à²•à³à²·à²¾à²¶à³à²µà²¾à²¸à²ƒà¥¤ à²®à²¾à²§à³à²µà²¸à²‚à²ªà³à²°à²¦à²¾à²¯à³‡ à²…à²¯à²‚ à²—à³€à²¤à²¾à²¶à²¾à²¸à³à²¤à³à²°à²¸à³à²¯ à²¶à²¿à²°à³‹à²­à³‚à²¤à²ƒ à²¶à³à²²à³‹à²•à²ƒà¥¤</a:t>
             </a:r>
             <a:endParaRPr lang="en-US" sz="1300" dirty="0"/>
           </a:p>
@@ -13648,7 +13648,7 @@
                 <a:ea typeface="Tiro Kannada" pitchFamily="34" charset="-122"/>
                 <a:cs typeface="Tiro Kannada" pitchFamily="34" charset="-120"/>
               </a:rPr>
-              <a:t>ಚರಮಶ್ಲೋಕಃ — ಮಧ್ವಾಚಾರ್ಯಸ್ಯ ಸಾಕ್ಷಾತ್ ಮೋಕ್ಷೋಪದೇಶಃ।</a:t>
+              <a:t>à²šà²°à²®à²¶à³à²²à³‹à²•à²ƒ â€” à²®à²§à³à²µà²¾à²šà²¾à²°à³à²¯à²¸à³à²¯ à²¸à²¾à²•à³à²·à²¾à²¤à³ à²®à³‹à²•à³à²·à³‹à²ªà²¦à³‡à²¶à²ƒà¥¤</a:t>
             </a:r>
             <a:endParaRPr lang="en-US" sz="1300" dirty="0"/>
           </a:p>
@@ -13818,7 +13818,7 @@
                 <a:ea typeface="Tiro Kannada" pitchFamily="34" charset="-122"/>
                 <a:cs typeface="Tiro Kannada" pitchFamily="34" charset="-120"/>
               </a:rPr>
-              <a:t>ಸರ್ವಧರ್ಮಾನ್ಪರಿತ್ಯಜ್ಯ ಮಾಮೇಕಂ ಶರಣಂ ವ್ರಜ।</a:t>
+              <a:t>à²¸à²°à³à²µà²§à²°à³à²®à²¾à²¨à³à²ªà²°à²¿à²¤à³à²¯à²œà³à²¯ à²®à²¾à²®à³‡à²•à²‚ à²¶à²°à²£à²‚ à²µà³à²°à²œà¥¤</a:t>
             </a:r>
             <a:endParaRPr lang="en-US" sz="1200" dirty="0"/>
           </a:p>
@@ -13838,7 +13838,7 @@
                 <a:ea typeface="Tiro Kannada" pitchFamily="34" charset="-122"/>
                 <a:cs typeface="Tiro Kannada" pitchFamily="34" charset="-120"/>
               </a:rPr>
-              <a:t>ಅಹಂ ತ್ವಾ ಸರ್ವಪಾಪೇಭ್ಯೋ ಮೋಕ್ಷಯಿಷ್ಯಾಮಿ ಮಾ ಶುಚಃ॥</a:t>
+              <a:t>à²…à²¹à²‚ à²¤à³à²µà²¾ à²¸à²°à³à²µà²ªà²¾à²ªà³‡à²­à³à²¯à³‹ à²®à³‹à²•à³à²·à²¯à²¿à²·à³à²¯à²¾à²®à²¿ à²®à²¾ à²¶à³à²šà²ƒà¥¥</a:t>
             </a:r>
             <a:endParaRPr lang="en-US" sz="1200" dirty="0"/>
           </a:p>
@@ -13987,7 +13987,7 @@
                 <a:ea typeface="Tiro Kannada" pitchFamily="34" charset="-122"/>
                 <a:cs typeface="Tiro Kannada" pitchFamily="34" charset="-120"/>
               </a:rPr>
-              <a:t>ಜೀವ — ದೇಹಸ್ಥ ಆತ್ಮ</a:t>
+              <a:t>à²œà³€à²µ â€” à²¦à³‡à²¹à²¸à³à²¥ à²†à²¤à³à²®</a:t>
             </a:r>
             <a:endParaRPr lang="en-US" sz="3000" dirty="0"/>
           </a:p>
@@ -14029,7 +14029,7 @@
                 <a:ea typeface="Tiro Kannada" pitchFamily="34" charset="-122"/>
                 <a:cs typeface="Tiro Kannada" pitchFamily="34" charset="-120"/>
               </a:rPr>
-              <a:t>ಹರಿಯ ನಿತ್ಯ ಅಂಶ (ಗೀ॰ ೧೫।೭) — ಸತ್ಯ, ಭಿನ್ನ, ಬಹುವಿಧ, ಎಂದಿಗೂ ಬ್ರಹ್ಮದಲ್ಲಿ ಲೀನವಾಗುವುದಿಲ್ಲ. ಮುಕ್ತಿ-ಪರ್ಯಂತ ಅವಿದ್ಯೆಯಿಂದ ಬದ್ಧ.</a:t>
+              <a:t>à²¹à²°à²¿à²¯ à²¨à²¿à²¤à³à²¯ à²…à²‚à²¶ (à²—à³€à¥° à³§à³«à¥¤à³­) â€” à²¸à²¤à³à²¯, à²­à²¿à²¨à³à²¨, à²¬à²¹à³à²µà²¿à²§, à²Žà²‚à²¦à²¿à²—à³‚ à²¬à³à²°à²¹à³à²®à²¦à²²à³à²²à²¿ à²²à³€à²¨à²µà²¾à²—à³à²µà³à²¦à²¿à²²à³à²². à²®à³à²•à³à²¤à²¿-à²ªà²°à³à²¯à²‚à²¤ à²…à²µà²¿à²¦à³à²¯à³†à²¯à²¿à²‚à²¦ à²¬à²¦à³à²§.</a:t>
             </a:r>
             <a:endParaRPr lang="en-US" sz="1300" dirty="0"/>
           </a:p>
@@ -14071,7 +14071,7 @@
                 <a:ea typeface="Tiro Kannada" pitchFamily="34" charset="-122"/>
                 <a:cs typeface="Tiro Kannada" pitchFamily="34" charset="-120"/>
               </a:rPr>
-              <a:t>ಜೀವ-ಭೇದ ವಾಸ್ತವಿಕ (ಪಂಚ-ಭೇದಗಳಲ್ಲಿ ಮೊದಲನೆಯದು). ಜೀವ-ಬಹುತ್ವ ನಿತ್ಯ.</a:t>
+              <a:t>à²œà³€à²µ-à²­à³‡à²¦ à²µà²¾à²¸à³à²¤à²µà²¿à²• (à²ªà²‚à²š-à²­à³‡à²¦à²—à²³à²²à³à²²à²¿ à²®à³Šà²¦à²²à²¨à³†à²¯à²¦à³). à²œà³€à²µ-à²¬à²¹à³à²¤à³à²µ à²¨à²¿à²¤à³à²¯.</a:t>
             </a:r>
             <a:endParaRPr lang="en-US" sz="1300" dirty="0"/>
           </a:p>
@@ -14241,7 +14241,7 @@
                 <a:ea typeface="Tiro Kannada" pitchFamily="34" charset="-122"/>
                 <a:cs typeface="Tiro Kannada" pitchFamily="34" charset="-120"/>
               </a:rPr>
-              <a:t>ಮಮೈವಾಂಶೋ ಜೀವಲೋಕೇ ಜೀವಭೂತಃ ಸನಾತನಃ।</a:t>
+              <a:t>à²®à²®à³ˆà²µà²¾à²‚à²¶à³‹ à²œà³€à²µà²²à³‹à²•à³‡ à²œà³€à²µà²­à³‚à²¤à²ƒ à²¸à²¨à²¾à²¤à²¨à²ƒà¥¤</a:t>
             </a:r>
             <a:endParaRPr lang="en-US" sz="1200" dirty="0"/>
           </a:p>
@@ -14261,7 +14261,7 @@
                 <a:ea typeface="Tiro Kannada" pitchFamily="34" charset="-122"/>
                 <a:cs typeface="Tiro Kannada" pitchFamily="34" charset="-120"/>
               </a:rPr>
-              <a:t>ಮನಃಷಷ್ಠಾನೀಂದ್ರಿಯಾಣಿ ಪ್ರಕೃತಿಸ್ಥಾನಿ ಕರ್ಷತಿ॥</a:t>
+              <a:t>à²®à²¨à²ƒà²·à²·à³à² à²¾à²¨à³€à²‚à²¦à³à²°à²¿à²¯à²¾à²£à²¿ à²ªà³à²°à²•à³ƒà²¤à²¿à²¸à³à²¥à²¾à²¨à²¿ à²•à²°à³à²·à²¤à²¿à¥¥</a:t>
             </a:r>
             <a:endParaRPr lang="en-US" sz="1200" dirty="0"/>
           </a:p>
@@ -15026,7 +15026,7 @@
                 <a:ea typeface="Cormorant Garamond" pitchFamily="34" charset="-122"/>
                 <a:cs typeface="Cormorant Garamond" pitchFamily="34" charset="-120"/>
               </a:rPr>
-              <a:t>124</a:t>
+              <a:t>241</a:t>
             </a:r>
             <a:endParaRPr lang="en-US" sz="6000" dirty="0"/>
           </a:p>
@@ -15232,7 +15232,7 @@
                 <a:ea typeface="Cormorant Garamond" pitchFamily="34" charset="-122"/>
                 <a:cs typeface="Cormorant Garamond" pitchFamily="34" charset="-120"/>
               </a:rPr>
-              <a:t>112</a:t>
+              <a:t>124</a:t>
             </a:r>
             <a:endParaRPr lang="en-US" sz="6000" dirty="0"/>
           </a:p>
@@ -15700,7 +15700,7 @@
                 <a:ea typeface="Tiro Kannada" pitchFamily="34" charset="-122"/>
                 <a:cs typeface="Tiro Kannada" pitchFamily="34" charset="-120"/>
               </a:rPr>
-              <a:t>ಪರಮಾರ್ಥ</a:t>
+              <a:t>à²ªà²°à²®à²¾à²°à³à²¥</a:t>
             </a:r>
             <a:endParaRPr lang="en-US" sz="1300" dirty="0"/>
           </a:p>
@@ -15739,7 +15739,7 @@
                 <a:ea typeface="Cormorant Garamond" pitchFamily="34" charset="-122"/>
                 <a:cs typeface="Cormorant Garamond" pitchFamily="34" charset="-120"/>
               </a:rPr>
-              <a:t>Ultimate reality — Hari, the sarvottama</a:t>
+              <a:t>Ultimate reality â€” Hari, the sarvottama</a:t>
             </a:r>
             <a:endParaRPr lang="en-US" sz="1100" dirty="0"/>
           </a:p>
@@ -15803,7 +15803,7 @@
                 <a:ea typeface="Tiro Kannada" pitchFamily="34" charset="-122"/>
                 <a:cs typeface="Tiro Kannada" pitchFamily="34" charset="-120"/>
               </a:rPr>
-              <a:t>ತತ್ತ್ವ</a:t>
+              <a:t>à²¤à²¤à³à²¤à³à²µ</a:t>
             </a:r>
             <a:endParaRPr lang="en-US" sz="1300" dirty="0"/>
           </a:p>
@@ -15842,7 +15842,7 @@
                 <a:ea typeface="Cormorant Garamond" pitchFamily="34" charset="-122"/>
                 <a:cs typeface="Cormorant Garamond" pitchFamily="34" charset="-120"/>
               </a:rPr>
-              <a:t>Metaphysical categories — jīva, prakṛti, kāla</a:t>
+              <a:t>Metaphysical categories â€” jÄ«va, praká¹›ti, kÄla</a:t>
             </a:r>
             <a:endParaRPr lang="en-US" sz="1100" dirty="0"/>
           </a:p>
@@ -15906,7 +15906,7 @@
                 <a:ea typeface="Tiro Kannada" pitchFamily="34" charset="-122"/>
                 <a:cs typeface="Tiro Kannada" pitchFamily="34" charset="-120"/>
               </a:rPr>
-              <a:t>ಕ್ಷೇತ್ರ-ಕ್ಷೇತ್ರಜ್ಞ</a:t>
+              <a:t>à²•à³à²·à³‡à²¤à³à²°-à²•à³à²·à³‡à²¤à³à²°à²œà³à²ž</a:t>
             </a:r>
             <a:endParaRPr lang="en-US" sz="1300" dirty="0"/>
           </a:p>
@@ -15945,7 +15945,7 @@
                 <a:ea typeface="Cormorant Garamond" pitchFamily="34" charset="-122"/>
                 <a:cs typeface="Cormorant Garamond" pitchFamily="34" charset="-120"/>
               </a:rPr>
-              <a:t>Field &amp; field-knower — body, knower, 24 elements (Ch 13)</a:t>
+              <a:t>Field &amp; field-knower â€” body, knower, 24 elements (Ch 13)</a:t>
             </a:r>
             <a:endParaRPr lang="en-US" sz="1100" dirty="0"/>
           </a:p>
@@ -16009,7 +16009,7 @@
                 <a:ea typeface="Tiro Kannada" pitchFamily="34" charset="-122"/>
                 <a:cs typeface="Tiro Kannada" pitchFamily="34" charset="-120"/>
               </a:rPr>
-              <a:t>ಗುಣ</a:t>
+              <a:t>à²—à³à²£</a:t>
             </a:r>
             <a:endParaRPr lang="en-US" sz="1300" dirty="0"/>
           </a:p>
@@ -16048,7 +16048,7 @@
                 <a:ea typeface="Cormorant Garamond" pitchFamily="34" charset="-122"/>
                 <a:cs typeface="Cormorant Garamond" pitchFamily="34" charset="-120"/>
               </a:rPr>
-              <a:t>The three modes of prakṛti — sattva, rajas, tamas</a:t>
+              <a:t>The three modes of praká¹›ti â€” sattva, rajas, tamas</a:t>
             </a:r>
             <a:endParaRPr lang="en-US" sz="1100" dirty="0"/>
           </a:p>
@@ -16112,7 +16112,7 @@
                 <a:ea typeface="Tiro Kannada" pitchFamily="34" charset="-122"/>
                 <a:cs typeface="Tiro Kannada" pitchFamily="34" charset="-120"/>
               </a:rPr>
-              <a:t>ಯೋಗ</a:t>
+              <a:t>à²¯à³‹à²—</a:t>
             </a:r>
             <a:endParaRPr lang="en-US" sz="1300" dirty="0"/>
           </a:p>
@@ -16151,7 +16151,7 @@
                 <a:ea typeface="Cormorant Garamond" pitchFamily="34" charset="-122"/>
                 <a:cs typeface="Cormorant Garamond" pitchFamily="34" charset="-120"/>
               </a:rPr>
-              <a:t>Paths — karma, jñāna, bhakti, dhyāna, sannyāsa</a:t>
+              <a:t>Paths â€” karma, jÃ±Äna, bhakti, dhyÄna, sannyÄsa</a:t>
             </a:r>
             <a:endParaRPr lang="en-US" sz="1100" dirty="0"/>
           </a:p>
@@ -16215,7 +16215,7 @@
                 <a:ea typeface="Tiro Kannada" pitchFamily="34" charset="-122"/>
                 <a:cs typeface="Tiro Kannada" pitchFamily="34" charset="-120"/>
               </a:rPr>
-              <a:t>ಸಾಧನಾ</a:t>
+              <a:t>à²¸à²¾à²§à²¨à²¾</a:t>
             </a:r>
             <a:endParaRPr lang="en-US" sz="1300" dirty="0"/>
           </a:p>
@@ -16254,7 +16254,7 @@
                 <a:ea typeface="Cormorant Garamond" pitchFamily="34" charset="-122"/>
                 <a:cs typeface="Cormorant Garamond" pitchFamily="34" charset="-120"/>
               </a:rPr>
-              <a:t>Practices — śraddhā, vairāgya, yajña, tapas, tyāga</a:t>
+              <a:t>Practices â€” Å›raddhÄ, vairÄgya, yajÃ±a, tapas, tyÄga</a:t>
             </a:r>
             <a:endParaRPr lang="en-US" sz="1100" dirty="0"/>
           </a:p>
@@ -16318,7 +16318,7 @@
                 <a:ea typeface="Tiro Kannada" pitchFamily="34" charset="-122"/>
                 <a:cs typeface="Tiro Kannada" pitchFamily="34" charset="-120"/>
               </a:rPr>
-              <a:t>ಅಂತಃಕರಣ</a:t>
+              <a:t>à²…à²‚à²¤à²ƒà²•à²°à²£</a:t>
             </a:r>
             <a:endParaRPr lang="en-US" sz="1300" dirty="0"/>
           </a:p>
@@ -16357,7 +16357,7 @@
                 <a:ea typeface="Cormorant Garamond" pitchFamily="34" charset="-122"/>
                 <a:cs typeface="Cormorant Garamond" pitchFamily="34" charset="-120"/>
               </a:rPr>
-              <a:t>Inner instrument — manas, buddhi, ahaṅkāra, indriyas</a:t>
+              <a:t>Inner instrument â€” manas, buddhi, ahaá¹…kÄra, indriyas</a:t>
             </a:r>
             <a:endParaRPr lang="en-US" sz="1100" dirty="0"/>
           </a:p>
@@ -16421,7 +16421,7 @@
                 <a:ea typeface="Tiro Kannada" pitchFamily="34" charset="-122"/>
                 <a:cs typeface="Tiro Kannada" pitchFamily="34" charset="-120"/>
               </a:rPr>
-              <a:t>ಧರ್ಮ</a:t>
+              <a:t>à²§à²°à³à²®</a:t>
             </a:r>
             <a:endParaRPr lang="en-US" sz="1300" dirty="0"/>
           </a:p>
@@ -16460,7 +16460,7 @@
                 <a:ea typeface="Cormorant Garamond" pitchFamily="34" charset="-122"/>
                 <a:cs typeface="Cormorant Garamond" pitchFamily="34" charset="-120"/>
               </a:rPr>
-              <a:t>Ethics — svadharma, niṣkāma-karma, sthita-prajña</a:t>
+              <a:t>Ethics â€” svadharma, niá¹£kÄma-karma, sthita-prajÃ±a</a:t>
             </a:r>
             <a:endParaRPr lang="en-US" sz="1100" dirty="0"/>
           </a:p>
@@ -16524,7 +16524,7 @@
                 <a:ea typeface="Tiro Kannada" pitchFamily="34" charset="-122"/>
                 <a:cs typeface="Tiro Kannada" pitchFamily="34" charset="-120"/>
               </a:rPr>
-              <a:t>ದೋಷ</a:t>
+              <a:t>à²¦à³‹à²·</a:t>
             </a:r>
             <a:endParaRPr lang="en-US" sz="1300" dirty="0"/>
           </a:p>
@@ -16563,7 +16563,7 @@
                 <a:ea typeface="Cormorant Garamond" pitchFamily="34" charset="-122"/>
                 <a:cs typeface="Cormorant Garamond" pitchFamily="34" charset="-120"/>
               </a:rPr>
-              <a:t>Defects — kāma, krodha, lobha, moha, asat-saṅga</a:t>
+              <a:t>Defects â€” kÄma, krodha, lobha, moha, asat-saá¹…ga</a:t>
             </a:r>
             <a:endParaRPr lang="en-US" sz="1100" dirty="0"/>
           </a:p>
@@ -16627,7 +16627,7 @@
                 <a:ea typeface="Tiro Kannada" pitchFamily="34" charset="-122"/>
                 <a:cs typeface="Tiro Kannada" pitchFamily="34" charset="-120"/>
               </a:rPr>
-              <a:t>ಫಲ</a:t>
+              <a:t>à²«à²²</a:t>
             </a:r>
             <a:endParaRPr lang="en-US" sz="1300" dirty="0"/>
           </a:p>
@@ -16666,7 +16666,7 @@
                 <a:ea typeface="Cormorant Garamond" pitchFamily="34" charset="-122"/>
                 <a:cs typeface="Cormorant Garamond" pitchFamily="34" charset="-120"/>
               </a:rPr>
-              <a:t>Goals &amp; states — mokṣa, paramagati, brāhmī-sthiti</a:t>
+              <a:t>Goals &amp; states â€” moká¹£a, paramagati, brÄhmÄ«-sthiti</a:t>
             </a:r>
             <a:endParaRPr lang="en-US" sz="1100" dirty="0"/>
           </a:p>
@@ -16730,7 +16730,7 @@
                 <a:ea typeface="Tiro Kannada" pitchFamily="34" charset="-122"/>
                 <a:cs typeface="Tiro Kannada" pitchFamily="34" charset="-120"/>
               </a:rPr>
-              <a:t>ಯಜ್ಞ</a:t>
+              <a:t>à²¯à²œà³à²ž</a:t>
             </a:r>
             <a:endParaRPr lang="en-US" sz="1300" dirty="0"/>
           </a:p>
@@ -16769,7 +16769,7 @@
                 <a:ea typeface="Cormorant Garamond" pitchFamily="34" charset="-122"/>
                 <a:cs typeface="Cormorant Garamond" pitchFamily="34" charset="-120"/>
               </a:rPr>
-              <a:t>Sacrifice varieties — dravya, tapo, jñāna, svādhyāya</a:t>
+              <a:t>Sacrifice varieties â€” dravya, tapo, jÃ±Äna, svÄdhyÄya</a:t>
             </a:r>
             <a:endParaRPr lang="en-US" sz="1100" dirty="0"/>
           </a:p>
@@ -16833,7 +16833,7 @@
                 <a:ea typeface="Tiro Kannada" pitchFamily="34" charset="-122"/>
                 <a:cs typeface="Tiro Kannada" pitchFamily="34" charset="-120"/>
               </a:rPr>
-              <a:t>ಪ್ರತೀಕ</a:t>
+              <a:t>à²ªà³à²°à²¤à³€à²•</a:t>
             </a:r>
             <a:endParaRPr lang="en-US" sz="1300" dirty="0"/>
           </a:p>
@@ -16872,7 +16872,7 @@
                 <a:ea typeface="Cormorant Garamond" pitchFamily="34" charset="-122"/>
                 <a:cs typeface="Cormorant Garamond" pitchFamily="34" charset="-120"/>
               </a:rPr>
-              <a:t>Symbols &amp; metaphors — aśvattha, ratha, praṇava</a:t>
+              <a:t>Symbols &amp; metaphors â€” aÅ›vattha, ratha, praá¹‡ava</a:t>
             </a:r>
             <a:endParaRPr lang="en-US" sz="1100" dirty="0"/>
           </a:p>
@@ -16982,7 +16982,7 @@
                 <a:ea typeface="Tiro Kannada" pitchFamily="34" charset="-122"/>
                 <a:cs typeface="Tiro Kannada" pitchFamily="34" charset="-120"/>
               </a:rPr>
-              <a:t>ಪರಮಾರ್ಥ</a:t>
+              <a:t>à²ªà²°à²®à²¾à²°à³à²¥</a:t>
             </a:r>
             <a:endParaRPr lang="en-US" sz="3000" dirty="0"/>
           </a:p>
@@ -17113,7 +17113,7 @@
                 <a:ea typeface="Tiro Kannada" pitchFamily="34" charset="-122"/>
                 <a:cs typeface="Tiro Kannada" pitchFamily="34" charset="-120"/>
               </a:rPr>
-              <a:t>ಬ್ರಹ್ಮ — ಪರತತ್ತ್ವ</a:t>
+              <a:t>à²¬à³à²°à²¹à³à²® â€” à²ªà²°à²¤à²¤à³à²¤à³à²µ</a:t>
             </a:r>
             <a:endParaRPr lang="en-US" sz="1300" dirty="0"/>
           </a:p>
@@ -17152,7 +17152,7 @@
                 <a:ea typeface="Cormorant Garamond" pitchFamily="34" charset="-122"/>
                 <a:cs typeface="Cormorant Garamond" pitchFamily="34" charset="-120"/>
               </a:rPr>
-              <a:t>BG 8.3 · 14.27 · 15.18</a:t>
+              <a:t>BG 8.3 Â· 14.27 Â· 15.18</a:t>
             </a:r>
             <a:endParaRPr lang="en-US" sz="950" dirty="0"/>
           </a:p>
@@ -17194,7 +17194,7 @@
                 <a:ea typeface="Tiro Kannada" pitchFamily="34" charset="-122"/>
                 <a:cs typeface="Tiro Kannada" pitchFamily="34" charset="-120"/>
               </a:rPr>
-              <a:t>ಮಧ್ವ-ಸಿದ್ಧಾಂತದಲ್ಲಿ ಬ್ರಹ್ಮ ಎಂಬ ಶಬ್ದವು ಕೇವಲ ವಿಷ್ಣುವಿನ (ನಾರಾಯಣನ) ವಾಚಕ — ಸರ್ವೋತ್ತಮ, ಕ್ಷರಾಕ್ಷರಾತೀತ ಪುರುಷೋತ್ತಮ। ನಿರ್ವಿಶೇಷ-ನಿರುಪಾಧಿ-ಸಾಮಾನ್ಯ-ತತ್ತ್ವವಾಚಕ ಅಲ್ಲ.</a:t>
+              <a:t>à²®à²§à³à²µ-à²¸à²¿à²¦à³à²§à²¾à²‚à²¤à²¦à²²à³à²²à²¿ à²¬à³à²°à²¹à³à²® à²Žà²‚à²¬ à²¶à²¬à³à²¦à²µà³ à²•à³‡à²µà²² à²µà²¿à²·à³à²£à³à²µà²¿à²¨ (à²¨à²¾à²°à²¾à²¯à²£à²¨) à²µà²¾à²šà²• â€” à²¸à²°à³à²µà³‹à²¤à³à²¤à²®, à²•à³à²·à²°à²¾à²•à³à²·à²°à²¾à²¤à³€à²¤ à²ªà³…</a:t>
             </a:r>
             <a:endParaRPr lang="en-US" sz="1050" dirty="0"/>
           </a:p>
@@ -17283,7 +17283,7 @@
                 <a:ea typeface="Tiro Kannada" pitchFamily="34" charset="-122"/>
                 <a:cs typeface="Tiro Kannada" pitchFamily="34" charset="-120"/>
               </a:rPr>
-              <a:t>ಪರಮಾತ್ಮಾ — ಅಂತರ್ಯಾಮಿ</a:t>
+              <a:t>à²ªà²°à²®à²¾à²¤à³à²®à²¾ â€” à²…à²‚à²¤à²°à³à²¯à²¾à²®à²¿</a:t>
             </a:r>
             <a:endParaRPr lang="en-US" sz="1300" dirty="0"/>
           </a:p>
@@ -17322,7 +17322,7 @@
                 <a:ea typeface="Cormorant Garamond" pitchFamily="34" charset="-122"/>
                 <a:cs typeface="Cormorant Garamond" pitchFamily="34" charset="-120"/>
               </a:rPr>
-              <a:t>BG 13.22 · 15.17</a:t>
+              <a:t>BG 13.22 Â· 15.17</a:t>
             </a:r>
             <a:endParaRPr lang="en-US" sz="950" dirty="0"/>
           </a:p>
@@ -17364,7 +17364,7 @@
                 <a:ea typeface="Tiro Kannada" pitchFamily="34" charset="-122"/>
                 <a:cs typeface="Tiro Kannada" pitchFamily="34" charset="-120"/>
               </a:rPr>
-              <a:t>ಸರ್ವ ದೇಹಗಳಲ್ಲಿ ಸಾಕ್ಷಿ-ಭರ್ತೃ-ನಿಯಂತೃ ರೂಪದಲ್ಲಿ ಸ್ಥಿತನಾದ ಪರಮ ಆತ್ಮಾ. ಜೀವಕ್ಕಿಂತ ಅತ್ಯಂತ ಭಿನ್ನ (ಗೀ॰ ೧೫।೧೭).</a:t>
+              <a:t>à²¸à²°à³à²µ à²¦à³‡à²¹à²—à²³à²²à³à²²à²¿ à²¸à²¾à²•à³à²·à²¿-à²­à²°à³à²¤à³ƒ-à²¨à²¿à²¯à²‚à²¤à³ƒ à²°à³‚à²ªà²¦à²²à³à²²à²¿ à²¸à³à²¥à²¿à²¤à²¨à²¾à²¦ à²ªà²°à²® à²†à²¤à³à²®à²¾. à²œà³€à²µà²•à³à²•à²¿à²‚à²¤ à²…à²¤à³à²¯à²‚à²¤ à²­à²¿à²¨à³à²¨ (à²—à³€à¥° à³§à³«à¥¤à³§…</a:t>
             </a:r>
             <a:endParaRPr lang="en-US" sz="1050" dirty="0"/>
           </a:p>
@@ -17453,7 +17453,7 @@
                 <a:ea typeface="Tiro Kannada" pitchFamily="34" charset="-122"/>
                 <a:cs typeface="Tiro Kannada" pitchFamily="34" charset="-120"/>
               </a:rPr>
-              <a:t>ಪುರುಷೋತ್ತಮ — ಪರಮ ಪುರುಷ</a:t>
+              <a:t>à²ªà³à²°à³à²·à³‹à²¤à³à²¤à²® â€” à²ªà²°à²® à²ªà³à²°à³à²·</a:t>
             </a:r>
             <a:endParaRPr lang="en-US" sz="1300" dirty="0"/>
           </a:p>
@@ -17492,7 +17492,7 @@
                 <a:ea typeface="Cormorant Garamond" pitchFamily="34" charset="-122"/>
                 <a:cs typeface="Cormorant Garamond" pitchFamily="34" charset="-120"/>
               </a:rPr>
-              <a:t>BG 15.18–19</a:t>
+              <a:t>BG 15.18â€“19</a:t>
             </a:r>
             <a:endParaRPr lang="en-US" sz="950" dirty="0"/>
           </a:p>
@@ -17534,7 +17534,7 @@
                 <a:ea typeface="Tiro Kannada" pitchFamily="34" charset="-122"/>
                 <a:cs typeface="Tiro Kannada" pitchFamily="34" charset="-120"/>
               </a:rPr>
-              <a:t>ಕ್ಷರಾಕ್ಷರಗಳಿಗಿಂತ ಅತೀತನಾದ ಉತ್ತಮ ಪುರುಷ ಎಂಬುದು ಕೃಷ್ಣನ ಆತ್ಮ-ನಿರೂಪಣೆ. ಹದಿನೈದನೆಯ ಅಧ್ಯಾಯದ ಹರ್ಮೆನ್ಯೂಟಿಕ್ ಕೇಂದ್ರ.</a:t>
+              <a:t>à²•à³à²·à²°à²¾à²•à³à²·à²°à²—à²³à²¿à²—à²¿à²‚à²¤ à²…à²¤à³€à²¤à²¨à²¾à²¦ à²‰à²¤à³à²¤à²® à²ªà³à²°à³à²· à²Žà²‚à²¬à³à²¦à³ à²•à³ƒà²·à³à²£à²¨ à²†à²¤à³à²®-à²¨à²¿à²°à³‚à²ªà²£à³†. à²¹à²¦à²¿à²¨à³ˆà²¦à²¨à³†à²¯ à²…à²§à³à²¯à²¾à²¯à²¦ à²¹à²°à³à²®à³†à²¨à³à²¯à³‚à²Ÿà…</a:t>
             </a:r>
             <a:endParaRPr lang="en-US" sz="1050" dirty="0"/>
           </a:p>
@@ -17623,7 +17623,7 @@
                 <a:ea typeface="Tiro Kannada" pitchFamily="34" charset="-122"/>
                 <a:cs typeface="Tiro Kannada" pitchFamily="34" charset="-120"/>
               </a:rPr>
-              <a:t>ಅಕ್ಷರಪುರುಷ — ಕೂಟಸ್ಥ</a:t>
+              <a:t>à²…à²•à³à²·à²°à²ªà³à²°à³à²· â€” à²•à³‚à²Ÿà²¸à³à²¥</a:t>
             </a:r>
             <a:endParaRPr lang="en-US" sz="1300" dirty="0"/>
           </a:p>
@@ -17704,7 +17704,7 @@
                 <a:ea typeface="Tiro Kannada" pitchFamily="34" charset="-122"/>
                 <a:cs typeface="Tiro Kannada" pitchFamily="34" charset="-120"/>
               </a:rPr>
-              <a:t>ಕೂಟಸ್ಥ ಅಕ್ಷರ — ಮಧ್ವ-ಮತದಲ್ಲಿ ಲಕ್ಷ್ಮೀ, ನಿತ್ಯ-ಮುಕ್ತ-ಜೀವ-ಗಣ-ಮುಖ್ಯಾ. ಹರಿಯ ನಂತರ ಸರ್ವೋತ್ತಮಾ.</a:t>
+              <a:t>à²•à³‚à²Ÿà²¸à³à²¥ à²…à²•à³à²·à²° â€” à²®à²§à³à²µ-à²®à²¤à²¦à²²à³à²²à²¿ à²²à²•à³à²·à³à²®à³€, à²¨à²¿à²¤à³à²¯-à²®à³à²•à³à²¤-à²œà³€à²µ-à²—à²£-à²®à³à²–à³à²¯à²¾. à²¹à²°à²¿à²¯ à²¨à²‚à²¤à²° à²¸à²°à³à²µà³‹à²¤à³à²¤à²®à²¾.</a:t>
             </a:r>
             <a:endParaRPr lang="en-US" sz="1050" dirty="0"/>
           </a:p>
@@ -17814,7 +17814,7 @@
                 <a:ea typeface="Tiro Kannada" pitchFamily="34" charset="-122"/>
                 <a:cs typeface="Tiro Kannada" pitchFamily="34" charset="-120"/>
               </a:rPr>
-              <a:t>ತತ್ತ್ವ</a:t>
+              <a:t>à²¤à²¤à³à²¤à³à²µ</a:t>
             </a:r>
             <a:endParaRPr lang="en-US" sz="3000" dirty="0"/>
           </a:p>
@@ -17945,7 +17945,7 @@
                 <a:ea typeface="Tiro Kannada" pitchFamily="34" charset="-122"/>
                 <a:cs typeface="Tiro Kannada" pitchFamily="34" charset="-120"/>
               </a:rPr>
-              <a:t>ಜೀವ — ದೇಹಸ್ಥ ಆತ್ಮ</a:t>
+              <a:t>à²œà³€à²µ â€” à²¦à³‡à²¹à²¸à³à²¥ à²†à²¤à³à²®</a:t>
             </a:r>
             <a:endParaRPr lang="en-US" sz="1300" dirty="0"/>
           </a:p>
@@ -18026,7 +18026,7 @@
                 <a:ea typeface="Tiro Kannada" pitchFamily="34" charset="-122"/>
                 <a:cs typeface="Tiro Kannada" pitchFamily="34" charset="-120"/>
               </a:rPr>
-              <a:t>ಹರಿಯ ನಿತ್ಯ ಅಂಶ (ಗೀ॰ ೧೫।೭) — ಸತ್ಯ, ಭಿನ್ನ, ಬಹುವಿಧ, ಎಂದಿಗೂ ಬ್ರಹ್ಮದಲ್ಲಿ ಲೀನವಾಗುವುದಿಲ್ಲ. ಮುಕ್ತಿ-ಪರ್ಯಂತ ಅವಿದ್ಯೆಯಿಂದ ಬದ್ಧ.</a:t>
+              <a:t>à²¹à²°à²¿à²¯ à²¨à²¿à²¤à³à²¯ à²…à²‚à²¶ (à²—à³€à¥° à³§à³«à¥¤à³­) â€” à²¸à²¤à³à²¯, à²­à²¿à²¨à³à²¨, à²¬à²¹à³à²µà²¿à²§, à²Žà²‚à²¦à²¿à²—à³‚ à²¬à³à²°à²¹à³à²®à²¦à²²à³à²²à²¿ à²²à³€à²¨à²µà²¾à²—à³à²µà³à²¦à²¿à²²à³à²². à²®à³à²•à³à²¤à²¿-à²ªà²°à³à²¯à²‚à²¤ à²…à…</a:t>
             </a:r>
             <a:endParaRPr lang="en-US" sz="1050" dirty="0"/>
           </a:p>
@@ -18115,7 +18115,7 @@
                 <a:ea typeface="Tiro Kannada" pitchFamily="34" charset="-122"/>
                 <a:cs typeface="Tiro Kannada" pitchFamily="34" charset="-120"/>
               </a:rPr>
-              <a:t>ಪ್ರಕೃತಿ — ಮೂಲ-ಜಡ</a:t>
+              <a:t>à²ªà³à²°à²•à³ƒà²¤à²¿ â€” à²®à³‚à²²-à²œà²¡</a:t>
             </a:r>
             <a:endParaRPr lang="en-US" sz="1300" dirty="0"/>
           </a:p>
@@ -18154,7 +18154,7 @@
                 <a:ea typeface="Cormorant Garamond" pitchFamily="34" charset="-122"/>
                 <a:cs typeface="Cormorant Garamond" pitchFamily="34" charset="-120"/>
               </a:rPr>
-              <a:t>BG 7.4–5 · 9.10</a:t>
+              <a:t>BG 7.4â€“5 Â· 9.10</a:t>
             </a:r>
             <a:endParaRPr lang="en-US" sz="950" dirty="0"/>
           </a:p>
@@ -18196,7 +18196,7 @@
                 <a:ea typeface="Tiro Kannada" pitchFamily="34" charset="-122"/>
                 <a:cs typeface="Tiro Kannada" pitchFamily="34" charset="-120"/>
               </a:rPr>
-              <a:t>ಹರಿಯ ಅಪರಾ-ಪ್ರಕೃತಿ ಎಂಟು ವಿಧ — ಭೂಮಿ, ಆಪಃ, ಅನಲ, ವಾಯು, ಖಂ, ಮನಃ, ಬುದ್ಧಿ, ಅಹಂಕಾರ. ಸರ್ವ-ರೂಪಗಳ ಯೋನಿ.</a:t>
+              <a:t>à²¹à²°à²¿à²¯ à²…à²ªà²°à²¾-à²ªà³à²°à²•à³ƒà²¤à²¿ à²Žà²‚à²Ÿà³ à²µà²¿à²§ â€” à²­à³‚à²®à²¿, à²†à²ªà²ƒ, à²…à²¨à²², à²µà²¾à²¯à³, à²–à²‚, à²®à²¨à²ƒ, à²¬à³à²¦à³à²§à²¿, à²…à²¹à²‚à²•à²¾à²°. à²¸à²°à³à²µ-à²°à³‚à²ªà²—à²³ à²¯à³‹à²¨à²¿.</a:t>
             </a:r>
             <a:endParaRPr lang="en-US" sz="1050" dirty="0"/>
           </a:p>
@@ -18285,7 +18285,7 @@
                 <a:ea typeface="Tiro Kannada" pitchFamily="34" charset="-122"/>
                 <a:cs typeface="Tiro Kannada" pitchFamily="34" charset="-120"/>
               </a:rPr>
-              <a:t>ಸ್ವಭಾವ — ಸಹಜ-ಪ್ರಕೃತಿ</a:t>
+              <a:t>à²¸à³à²µà²­à²¾à²µ â€” à²¸à²¹à²œ-à²ªà³à²°à²•à³ƒà²¤à²¿</a:t>
             </a:r>
             <a:endParaRPr lang="en-US" sz="1300" dirty="0"/>
           </a:p>
@@ -18324,7 +18324,7 @@
                 <a:ea typeface="Cormorant Garamond" pitchFamily="34" charset="-122"/>
                 <a:cs typeface="Cormorant Garamond" pitchFamily="34" charset="-120"/>
               </a:rPr>
-              <a:t>BG 5.14 · 8.3 · 18.41</a:t>
+              <a:t>BG 5.14 Â· 8.3 Â· 18.41</a:t>
             </a:r>
             <a:endParaRPr lang="en-US" sz="950" dirty="0"/>
           </a:p>
@@ -18366,7 +18366,7 @@
                 <a:ea typeface="Tiro Kannada" pitchFamily="34" charset="-122"/>
                 <a:cs typeface="Tiro Kannada" pitchFamily="34" charset="-120"/>
               </a:rPr>
-              <a:t>ಪ್ರತಿ ಜೀವದ ಅನಾದಿ ಸಹಜ ಸ್ವಭಾವ (ಮಧ್ವ-ಮತದಲ್ಲಿ ಸ್ವರೂಪ-ಯೋಗ್ಯತಾ). ವರ್ಣ, ಸಾಮರ್ಥ್ಯ ಮತ್ತು ಅಂತಿಮ ಗತಿಯನ್ನು ನಿರ್ಧರಿಸುತ್ತದೆ.</a:t>
+              <a:t>à²ªà³à²°à²¤à²¿ à²œà³€à²µà²¦ à²…à²¨à²¾à²¦à²¿ à²¸à²¹à²œ à²¸à³à²µà²­à²¾à²µ (à²®à²§à³à²µ-à²®à²¤à²¦à²²à³à²²à²¿ à²¸à³à²µà²°à³‚à²ª-à²¯à³‹à²—à³à²¯à²¤à²¾). à²µà²°à³à²£, à²¸à²¾à²®à²°à³à²¥à³à²¯ à²®à²¤à³à²¤à³ à²…à²‚à²¤à²¿à²® à²—à²¤à²¿à²¯à²¨à³à²¨à³ à²¨à²¿à²°…</a:t>
             </a:r>
             <a:endParaRPr lang="en-US" sz="1050" dirty="0"/>
           </a:p>
@@ -18455,7 +18455,7 @@
                 <a:ea typeface="Tiro Kannada" pitchFamily="34" charset="-122"/>
                 <a:cs typeface="Tiro Kannada" pitchFamily="34" charset="-120"/>
               </a:rPr>
-              <a:t>ಈಶ್ವರ — ನಿಯಂತಾ</a:t>
+              <a:t>à²ˆà²¶à³à²µà²° â€” à²¨à²¿à²¯à²‚à²¤à²¾</a:t>
             </a:r>
             <a:endParaRPr lang="en-US" sz="1300" dirty="0"/>
           </a:p>
@@ -18536,7 +18536,7 @@
                 <a:ea typeface="Tiro Kannada" pitchFamily="34" charset="-122"/>
                 <a:cs typeface="Tiro Kannada" pitchFamily="34" charset="-120"/>
               </a:rPr>
-              <a:t>ಹರಿಯು ಅಂತರ್ಯಾಮಿ ರೂಪದಲ್ಲಿ ಸರ್ವ-ಹೃದಯದಲ್ಲಿ ನಿಂತು ಯಂತ್ರಾರೂಢ-ಮಾಯೆಯಿಂದ ಜೀವಗಳನ್ನು ಭ್ರಮಿಸುತ್ತಾನೆ.</a:t>
+              <a:t>à²¹à²°à²¿à²¯à³ à²…à²‚à²¤à²°à³à²¯à²¾à²®à²¿ à²°à³‚à²ªà²¦à²²à³à²²à²¿ à²¸à²°à³à²µ-à²¹à³ƒà²¦à²¯à²¦à²²à³à²²à²¿ à²¨à²¿à²‚à²¤à³ à²¯à²‚à²¤à³à²°à²¾à²°à³‚à²¢-à²®à²¾à²¯à³†à²¯à²¿à²‚à²¦ à²œà³€à²µà²—à²³à²¨à³à²¨à³ à²­à³à²°à²®à²¿à²¸à³à²¤à³à²¤à²¾à²¨à³†.</a:t>
             </a:r>
             <a:endParaRPr lang="en-US" sz="1050" dirty="0"/>
           </a:p>
@@ -18646,7 +18646,7 @@
                 <a:ea typeface="Tiro Kannada" pitchFamily="34" charset="-122"/>
                 <a:cs typeface="Tiro Kannada" pitchFamily="34" charset="-120"/>
               </a:rPr>
-              <a:t>ಕ್ಷೇತ್ರ-ಕ್ಷೇತ್ರಜ್ಞ</a:t>
+              <a:t>à²•à³à²·à³‡à²¤à³à²°-à²•à³à²·à³‡à²¤à³à²°à²œà³à²ž</a:t>
             </a:r>
             <a:endParaRPr lang="en-US" sz="3000" dirty="0"/>
           </a:p>
@@ -18777,7 +18777,7 @@
                 <a:ea typeface="Tiro Kannada" pitchFamily="34" charset="-122"/>
                 <a:cs typeface="Tiro Kannada" pitchFamily="34" charset="-120"/>
               </a:rPr>
-              <a:t>ಕ್ಷೇತ್ರಜ್ಞ — ಕ್ಷೇತ್ರ-ವೇತ್ತ</a:t>
+              <a:t>à²•à³à²·à³‡à²¤à³à²°à²œà³à²ž â€” à²•à³à²·à³‡à²¤à³à²°-à²µà³‡à²¤à³à²¤</a:t>
             </a:r>
             <a:endParaRPr lang="en-US" sz="1300" dirty="0"/>
           </a:p>
@@ -18858,7 +18858,7 @@
                 <a:ea typeface="Tiro Kannada" pitchFamily="34" charset="-122"/>
                 <a:cs typeface="Tiro Kannada" pitchFamily="34" charset="-120"/>
               </a:rPr>
-              <a:t>ಕ್ಷೇತ್ರವನ್ನು ಬಲ್ಲವನು ಕ್ಷೇತ್ರಜ್ಞ. ಕೃಷ್ಣ-ವಚನ — "ಕ್ಷೇತ್ರಜ್ಞಂ ಚಾಪಿ ಮಾಂ ವಿದ್ಧಿ ಸರ್ವ-ಕ್ಷೇತ್ರೇಷು ಭಾರತ" — ಹರಿಯೇ ಪರಮ ಕ್ಷೇತ್ರಜ್ಞ.</a:t>
+              <a:t>à²•à³à²·à³‡à²¤à³à²°à²µà²¨à³à²¨à³ à²¬à²²à³à²²à²µà²¨à³ à²•à³à²·à³‡à²¤à³à²°à²œà³à²ž. à²•à³ƒà²·à³à²£-à²µà²šà²¨ â€” "à²•à³à²·à³‡à²¤à³à²°à²œà³à²žà²‚ à²šà²¾à²ªà²¿ à²®à²¾à²‚ à²µà²¿à²¦à³à²§à²¿ à²¸à²°à³à²µ-à²•à³à²·à³‡à²¤à³à²°à³‡à²·à³ à²­à²¾à²°à²¤" â€…</a:t>
             </a:r>
             <a:endParaRPr lang="en-US" sz="1050" dirty="0"/>
           </a:p>
@@ -18947,7 +18947,7 @@
                 <a:ea typeface="Tiro Kannada" pitchFamily="34" charset="-122"/>
                 <a:cs typeface="Tiro Kannada" pitchFamily="34" charset="-120"/>
               </a:rPr>
-              <a:t>ಕ್ಷೇತ್ರ — ಶರೀರ</a:t>
+              <a:t>à²•à³à²·à³‡à²¤à³à²° â€” à²¶à²°à³€à²°</a:t>
             </a:r>
             <a:endParaRPr lang="en-US" sz="1300" dirty="0"/>
           </a:p>
@@ -18986,7 +18986,7 @@
                 <a:ea typeface="Cormorant Garamond" pitchFamily="34" charset="-122"/>
                 <a:cs typeface="Cormorant Garamond" pitchFamily="34" charset="-120"/>
               </a:rPr>
-              <a:t>BG 13.1 · 13.5–6</a:t>
+              <a:t>BG 13.1 Â· 13.5â€“6</a:t>
             </a:r>
             <a:endParaRPr lang="en-US" sz="950" dirty="0"/>
           </a:p>
@@ -19028,7 +19028,7 @@
                 <a:ea typeface="Tiro Kannada" pitchFamily="34" charset="-122"/>
                 <a:cs typeface="Tiro Kannada" pitchFamily="34" charset="-120"/>
               </a:rPr>
-              <a:t>ಈ ಶರೀರವು ಇಪ್ಪತ್ತನಾಲ್ಕು ತತ್ತ್ವಗಳ ಸಂಘಾತ — ಮಹಾಭೂತಗಳು, ಅಹಂಕಾರ, ಬುದ್ಧಿ, ಅವ್ಯಕ್ತ, ಇಂದ್ರಿಯಗಳು, ಮನಸ್ಸು, ವಿಷಯಗಳು, ಇಚ್ಛಾ, ದ್ವೇಷ, ಸುಖ, ದುಃಖ, ಸಂಘಾತ, ಚೇತನಾ, ಧೃತಿ.</a:t>
+              <a:t>à²ˆ à²¶à²°à³€à²°à²µà³ à²‡à²ªà³à²ªà²¤à³à²¤à²¨à²¾à²²à³à²•à³ à²¤à²¤à³à²¤à³à²µà²—à²³ à²¸à²‚à²˜à²¾à²¤ â€” à²®à²¹à²¾à²­à³‚à²¤à²—à²³à³, à²…à²¹à²‚à²•à²¾à²°, à²¬à³à²¦à³à²§à²¿, à²…à²µà³à²¯à²•à³à²¤, à²‡à²‚à²¦à³à²°à²¿à²¯à²—à²³à³, à²®à²¨à²¸à³à²¸à³, à²µà²¿…</a:t>
             </a:r>
             <a:endParaRPr lang="en-US" sz="1050" dirty="0"/>
           </a:p>
@@ -19117,7 +19117,7 @@
                 <a:ea typeface="Tiro Kannada" pitchFamily="34" charset="-122"/>
                 <a:cs typeface="Tiro Kannada" pitchFamily="34" charset="-120"/>
               </a:rPr>
-              <a:t>ಮಹಾಭೂತಗಳು — ಐದು ಸ್ಥೂಲ ತತ್ತ್ವಗಳು</a:t>
+              <a:t>à²®à²¹à²¾à²­à³‚à²¤à²—à²³à³ â€” à²à²¦à³ à²¸à³à²¥à³‚à²² à²¤à²¤à³à²¤à³à²µà²—à²³à³</a:t>
             </a:r>
             <a:endParaRPr lang="en-US" sz="1300" dirty="0"/>
           </a:p>
@@ -19198,7 +19198,7 @@
                 <a:ea typeface="Tiro Kannada" pitchFamily="34" charset="-122"/>
                 <a:cs typeface="Tiro Kannada" pitchFamily="34" charset="-120"/>
               </a:rPr>
-              <a:t>ಪೃಥಿವೀ, ಆಪ್, ತೇಜ, ವಾಯು, ಆಕಾಶ — ಇಪ್ಪತ್ತನಾಲ್ಕು ಕ್ಷೇತ್ರ-ತತ್ತ್ವಗಳಲ್ಲಿ ಮೊದಲ ಐದು.</a:t>
+              <a:t>à²ªà³ƒà²¥à²¿à²µà³€, à²†à²ªà³, à²¤à³‡à²œ, à²µà²¾à²¯à³, à²†à²•à²¾à²¶ â€” à²‡à²ªà³à²ªà²¤à³à²¤à²¨à²¾à²²à³à²•à³ à²•à³à²·à³‡à²¤à³à²°-à²¤à²¤à³à²¤à³à²µà²—à²³à²²à³à²²à²¿ à²®à³Šà²¦à²² à²à²¦à³.</a:t>
             </a:r>
             <a:endParaRPr lang="en-US" sz="1050" dirty="0"/>
           </a:p>
@@ -19287,7 +19287,7 @@
                 <a:ea typeface="Tiro Kannada" pitchFamily="34" charset="-122"/>
                 <a:cs typeface="Tiro Kannada" pitchFamily="34" charset="-120"/>
               </a:rPr>
-              <a:t>ಅವ್ಯಕ್ತ — ಮೂಲ-ಪ್ರಕೃತಿ</a:t>
+              <a:t>à²…à²µà³à²¯à²•à³à²¤ â€” à²®à³‚à²²-à²ªà³à²°à²•à³ƒà²¤à²¿</a:t>
             </a:r>
             <a:endParaRPr lang="en-US" sz="1300" dirty="0"/>
           </a:p>
@@ -19326,7 +19326,7 @@
                 <a:ea typeface="Cormorant Garamond" pitchFamily="34" charset="-122"/>
                 <a:cs typeface="Cormorant Garamond" pitchFamily="34" charset="-120"/>
               </a:rPr>
-              <a:t>BG 13.5 · 8.18</a:t>
+              <a:t>BG 13.5 Â· 8.18</a:t>
             </a:r>
             <a:endParaRPr lang="en-US" sz="950" dirty="0"/>
           </a:p>
@@ -19368,7 +19368,7 @@
                 <a:ea typeface="Tiro Kannada" pitchFamily="34" charset="-122"/>
                 <a:cs typeface="Tiro Kannada" pitchFamily="34" charset="-120"/>
               </a:rPr>
-              <a:t>ವಿಕಾರಗಳಿಗೆ ಮೊದಲಿನ ಮೂಲ-ಪ್ರಕೃತಿ. ಅದರಿಂದ ಮಹತ್, ಅಹಂಕಾರ ಮತ್ತು ತನ್ಮಾತ್ರಗಳು ಪ್ರವರ್ತಿಸುತ್ತವೆ.</a:t>
+              <a:t>à²µà²¿à²•à²¾à²°à²—à²³à²¿à²—à³† à²®à³Šà²¦à²²à²¿à²¨ à²®à³‚à²²-à²ªà³à²°à²•à³ƒà²¤à²¿. à²…à²¦à²°à²¿à²‚à²¦ à²®à²¹à²¤à³, à²…à²¹à²‚à²•à²¾à²° à²®à²¤à³à²¤à³ à²¤à²¨à³à²®à²¾à²¤à³à²°à²—à²³à³ à²ªà³à²°à²µà²°à³à²¤à²¿à²¸à³à²¤à³à²¤à²µà³†.</a:t>
             </a:r>
             <a:endParaRPr lang="en-US" sz="1050" dirty="0"/>
           </a:p>
@@ -19478,7 +19478,7 @@
                 <a:ea typeface="Tiro Kannada" pitchFamily="34" charset="-122"/>
                 <a:cs typeface="Tiro Kannada" pitchFamily="34" charset="-120"/>
               </a:rPr>
-              <a:t>ಗುಣ</a:t>
+              <a:t>à²—à³à²£</a:t>
             </a:r>
             <a:endParaRPr lang="en-US" sz="3000" dirty="0"/>
           </a:p>
@@ -19609,7 +19609,7 @@
                 <a:ea typeface="Tiro Kannada" pitchFamily="34" charset="-122"/>
                 <a:cs typeface="Tiro Kannada" pitchFamily="34" charset="-120"/>
               </a:rPr>
-              <a:t>ಪ್ರಕಾಶಸ್ಯ ಗುಣಃ</a:t>
+              <a:t>à²ªà³à²°à²•à²¾à²¶à²¸à³à²¯ à²—à³à²£à²ƒ</a:t>
             </a:r>
             <a:endParaRPr lang="en-US" sz="1300" dirty="0"/>
           </a:p>
@@ -19648,7 +19648,7 @@
                 <a:ea typeface="Cormorant Garamond" pitchFamily="34" charset="-122"/>
                 <a:cs typeface="Cormorant Garamond" pitchFamily="34" charset="-120"/>
               </a:rPr>
-              <a:t>BG 14.6 · 14.11</a:t>
+              <a:t>BG 14.6 Â· 14.11</a:t>
             </a:r>
             <a:endParaRPr lang="en-US" sz="950" dirty="0"/>
           </a:p>
@@ -19690,7 +19690,7 @@
                 <a:ea typeface="Tiro Kannada" pitchFamily="34" charset="-122"/>
                 <a:cs typeface="Tiro Kannada" pitchFamily="34" charset="-120"/>
               </a:rPr>
-              <a:t>ಲಘು, ಪ್ರಕಾಶಕಂ, ಅನಾಮಯಮ್ — ಸುಖಸಂಗೇನ ಜ್ಞಾನಸಂಗೇನ ಚ ಜೀವಂ ಬಧ್ನಾತಿ। ವಿವೇಕಿಷು ಪ್ರಬಲಃ।</a:t>
+              <a:t>à²²à²˜à³, à²ªà³à²°à²•à²¾à²¶à²•à²‚, à²…à²¨à²¾à²®à²¯à²®à³ â€” à²¸à³à²–à²¸à²‚à²—à³‡à²¨ à²œà³à²žà²¾à²¨à²¸à²‚à²—à³‡à²¨ à²š à²œà³€à²µà²‚ à²¬à²§à³à²¨à²¾à²¤à²¿à¥¤ à²µà²¿à²µà³‡à²•à²¿à²·à³ à²ªà³à²°à²¬à²²à²ƒà¥¤</a:t>
             </a:r>
             <a:endParaRPr lang="en-US" sz="1050" dirty="0"/>
           </a:p>
@@ -19779,7 +19779,7 @@
                 <a:ea typeface="Tiro Kannada" pitchFamily="34" charset="-122"/>
                 <a:cs typeface="Tiro Kannada" pitchFamily="34" charset="-120"/>
               </a:rPr>
-              <a:t>ರಾಗಸ್ಯ ಗುಣಃ</a:t>
+              <a:t>à²°à²¾à²—à²¸à³à²¯ à²—à³à²£à²ƒ</a:t>
             </a:r>
             <a:endParaRPr lang="en-US" sz="1300" dirty="0"/>
           </a:p>
@@ -19818,7 +19818,7 @@
                 <a:ea typeface="Cormorant Garamond" pitchFamily="34" charset="-122"/>
                 <a:cs typeface="Cormorant Garamond" pitchFamily="34" charset="-120"/>
               </a:rPr>
-              <a:t>BG 14.7 · 14.12</a:t>
+              <a:t>BG 14.7 Â· 14.12</a:t>
             </a:r>
             <a:endParaRPr lang="en-US" sz="950" dirty="0"/>
           </a:p>
@@ -19860,7 +19860,7 @@
                 <a:ea typeface="Tiro Kannada" pitchFamily="34" charset="-122"/>
                 <a:cs typeface="Tiro Kannada" pitchFamily="34" charset="-120"/>
               </a:rPr>
-              <a:t>ರಾಗಾತ್ಮಕಂ ಸಂಗಾತ್ಮಕಂ — ತೃಷ್ಣಾಸಂಗಯೋಃ ಸಮುದ್ಭವಮ್। ಅನವರತಕರ್ಮಪ್ರವರ್ತಕಮ್।</a:t>
+              <a:t>à²°à²¾à²—à²¾à²¤à³à²®à²•à²‚ à²¸à²‚à²—à²¾à²¤à³à²®à²•à²‚ â€” à²¤à³ƒà²·à³à²£à²¾à²¸à²‚à²—à²¯à³‹à²ƒ à²¸à²®à³à²¦à³à²­à²µà²®à³à¥¤ à²…à²¨à²µà²°à²¤à²•à²°à³à²®à²ªà³à²°à²µà²°à³à²¤à²•à²®à³à¥¤</a:t>
             </a:r>
             <a:endParaRPr lang="en-US" sz="1050" dirty="0"/>
           </a:p>
@@ -19949,7 +19949,7 @@
                 <a:ea typeface="Tiro Kannada" pitchFamily="34" charset="-122"/>
                 <a:cs typeface="Tiro Kannada" pitchFamily="34" charset="-120"/>
               </a:rPr>
-              <a:t>ಅಂಧಕಾರಸ್ಯ ಗುಣಃ</a:t>
+              <a:t>à²…à²‚à²§à²•à²¾à²°à²¸à³à²¯ à²—à³à²£à²ƒ</a:t>
             </a:r>
             <a:endParaRPr lang="en-US" sz="1300" dirty="0"/>
           </a:p>
@@ -19988,7 +19988,7 @@
                 <a:ea typeface="Cormorant Garamond" pitchFamily="34" charset="-122"/>
                 <a:cs typeface="Cormorant Garamond" pitchFamily="34" charset="-120"/>
               </a:rPr>
-              <a:t>BG 14.8 · 14.13</a:t>
+              <a:t>BG 14.8 Â· 14.13</a:t>
             </a:r>
             <a:endParaRPr lang="en-US" sz="950" dirty="0"/>
           </a:p>
@@ -20030,7 +20030,7 @@
                 <a:ea typeface="Tiro Kannada" pitchFamily="34" charset="-122"/>
                 <a:cs typeface="Tiro Kannada" pitchFamily="34" charset="-120"/>
               </a:rPr>
-              <a:t>ಅಜ್ಞಾನಜಂ — ಸರ್ವಾನ್ ದೇಹಿನೋ ಮೋಹಯತಿ; ಪ್ರಮಾದಾಲಸ್ಯನಿದ್ರಾಭಿರ್ಬಧ್ನಾತಿ।</a:t>
+              <a:t>à²…à²œà³à²žà²¾à²¨à²œà²‚ â€” à²¸à²°à³à²µà²¾à²¨à³ à²¦à³‡à²¹à²¿à²¨à³‹ à²®à³‹à²¹à²¯à²¤à²¿; à²ªà³à²°à²®à²¾à²¦à²¾à²²à²¸à³à²¯à²¨à²¿à²¦à³à²°à²¾à²­à²¿à²°à³à²¬à²§à³à²¨à²¾à²¤à²¿à¥¤</a:t>
             </a:r>
             <a:endParaRPr lang="en-US" sz="1050" dirty="0"/>
           </a:p>
@@ -20119,7 +20119,7 @@
                 <a:ea typeface="Tiro Kannada" pitchFamily="34" charset="-122"/>
                 <a:cs typeface="Tiro Kannada" pitchFamily="34" charset="-120"/>
               </a:rPr>
-              <a:t>ಗುಣಾನಾಮತೀತಃ</a:t>
+              <a:t>à²—à³à²£à²¾à²¨à²¾à²®à²¤à³€à²¤à²ƒ</a:t>
             </a:r>
             <a:endParaRPr lang="en-US" sz="1300" dirty="0"/>
           </a:p>
@@ -20158,7 +20158,7 @@
                 <a:ea typeface="Cormorant Garamond" pitchFamily="34" charset="-122"/>
                 <a:cs typeface="Cormorant Garamond" pitchFamily="34" charset="-120"/>
               </a:rPr>
-              <a:t>BG 14.22–25</a:t>
+              <a:t>BG 14.22â€“25</a:t>
             </a:r>
             <a:endParaRPr lang="en-US" sz="950" dirty="0"/>
           </a:p>
@@ -20200,7 +20200,7 @@
                 <a:ea typeface="Tiro Kannada" pitchFamily="34" charset="-122"/>
                 <a:cs typeface="Tiro Kannada" pitchFamily="34" charset="-120"/>
               </a:rPr>
-              <a:t>ಯಸ್ಮಿನ್ ಸಂಗಾದ್ ಗುಣಪ್ರವೃತ್ತಿರ್ನ ಜಾಯತೇ; ಮಿತ್ರಾರಿಷು ಸಮಃ; ಸರ್ವಾರಂಭಪರಿತ್ಯಾಗೀ।</a:t>
+              <a:t>à²¯à²¸à³à²®à²¿à²¨à³ à²¸à²‚à²—à²¾à²¦à³ à²—à³à²£à²ªà³à²°à²µà³ƒà²¤à³à²¤à²¿à²°à³à²¨ à²œà²¾à²¯à²¤à³‡; à²®à²¿à²¤à³à²°à²¾à²°à²¿à²·à³ à²¸à²®à²ƒ; à²¸à²°à³à²µà²¾à²°à²‚à²­à²ªà²°à²¿à²¤à³à²¯à²¾à²—à³€à¥¤</a:t>
             </a:r>
             <a:endParaRPr lang="en-US" sz="1050" dirty="0"/>
           </a:p>
@@ -20310,7 +20310,7 @@
                 <a:ea typeface="Tiro Kannada" pitchFamily="34" charset="-122"/>
                 <a:cs typeface="Tiro Kannada" pitchFamily="34" charset="-120"/>
               </a:rPr>
-              <a:t>ಯೋಗ</a:t>
+              <a:t>à²¯à³‹à²—</a:t>
             </a:r>
             <a:endParaRPr lang="en-US" sz="3000" dirty="0"/>
           </a:p>
@@ -20441,7 +20441,7 @@
                 <a:ea typeface="Tiro Kannada" pitchFamily="34" charset="-122"/>
                 <a:cs typeface="Tiro Kannada" pitchFamily="34" charset="-120"/>
               </a:rPr>
-              <a:t>ಭಕ್ತಿಮಾರ್ಗಃ</a:t>
+              <a:t>à²­à²•à³à²¤à²¿à²®à²¾à²°à³à²—à²ƒ</a:t>
             </a:r>
             <a:endParaRPr lang="en-US" sz="1300" dirty="0"/>
           </a:p>
@@ -20480,7 +20480,7 @@
                 <a:ea typeface="Cormorant Garamond" pitchFamily="34" charset="-122"/>
                 <a:cs typeface="Cormorant Garamond" pitchFamily="34" charset="-120"/>
               </a:rPr>
-              <a:t>BG 9.22 · 11.54 · 18.55</a:t>
+              <a:t>BG 9.22 Â· 11.54 Â· 18.55</a:t>
             </a:r>
             <a:endParaRPr lang="en-US" sz="950" dirty="0"/>
           </a:p>
@@ -20522,7 +20522,7 @@
                 <a:ea typeface="Tiro Kannada" pitchFamily="34" charset="-122"/>
                 <a:cs typeface="Tiro Kannada" pitchFamily="34" charset="-120"/>
               </a:rPr>
-              <a:t>ಹರೌ ಪ್ರೇಮಪೂರ್ವಕಂ ಜ್ಞಾನಂ — ಸರ್ವಜ್ಞಾನಾತಿಶಾಯಿ। ಮಧ್ವಮತೇ ಭಕ್ತಿಃ ಸ್ಥಿರಜ್ಞಾನಪೂರ್ವಿಕಾಪ್ರೇಮರೂಪಾ, ಮೋಕ್ಷಸ್ಯ ಅನಿವಾರ್ಯಃ ಹೇತುಃ।</a:t>
+              <a:t>à²¹à²°à³Œ à²ªà³à²°à³‡à²®à²ªà³‚à²°à³à²µà²•à²‚ à²œà³à²žà²¾à²¨à²‚ â€” à²¸à²°à³à²µà²œà³à²žà²¾à²¨à²¾à²¤à²¿à²¶à²¾à²¯à²¿à¥¤ à²®à²§à³à²µà²®à²¤à³‡ à²­à²•à³à²¤à²¿à²ƒ à²¸à³à²¥à²¿à²°à²œà³à²žà²¾à²¨à²ªà³‚à²°à³à²µà²¿à²•à²¾à²ªà³à²°à³‡à²®à²°à³‚à²ªà²¾, à²®à³‹à²•à³…</a:t>
             </a:r>
             <a:endParaRPr lang="en-US" sz="1050" dirty="0"/>
           </a:p>
@@ -20611,7 +20611,7 @@
                 <a:ea typeface="Tiro Kannada" pitchFamily="34" charset="-122"/>
                 <a:cs typeface="Tiro Kannada" pitchFamily="34" charset="-120"/>
               </a:rPr>
-              <a:t>ಹರೌ ಶರಣಾಗತಿಃ</a:t>
+              <a:t>à²¹à²°à³Œ à²¶à²°à²£à²¾à²—à²¤à²¿à²ƒ</a:t>
             </a:r>
             <a:endParaRPr lang="en-US" sz="1300" dirty="0"/>
           </a:p>
@@ -20692,7 +20692,7 @@
                 <a:ea typeface="Tiro Kannada" pitchFamily="34" charset="-122"/>
                 <a:cs typeface="Tiro Kannada" pitchFamily="34" charset="-120"/>
               </a:rPr>
-              <a:t>'ಸರ್ವಧರ್ಮಾನ್ ಪರಿತ್ಯಜ್ಯ ಮಾಮೇಕಂ ಶರಣಂ ವ್ರಜ' — ಗೀತಾಯಾಃ ಚರಮೋಪದೇಶಃ। ಹರಿಂ ಸರ್ವಶರಣಂ ಕೃತ್ವಾ ಸರ್ವಪಾಪಮೋಚನಮ್।</a:t>
+              <a:t>'à²¸à²°à³à²µà²§à²°à³à²®à²¾à²¨à³ à²ªà²°à²¿à²¤à³à²¯à²œà³à²¯ à²®à²¾à²®à³‡à²•à²‚ à²¶à²°à²£à²‚ à²µà³à²°à²œ' â€” à²—à³€à²¤à²¾à²¯à²¾à²ƒ à²šà²°à²®à³‹à²ªà²¦à³‡à²¶à²ƒà¥¤ à²¹à²°à²¿à²‚ à²¸à²°à³à²µà²¶à²°à²£à²‚ à²•à³ƒà²¤à³à²µà²¾ à²¸à²°à³à²µà²ªà²¾à²ªà²®à³‹à²šà²¨à²…</a:t>
             </a:r>
             <a:endParaRPr lang="en-US" sz="1050" dirty="0"/>
           </a:p>
@@ -20781,7 +20781,7 @@
                 <a:ea typeface="Tiro Kannada" pitchFamily="34" charset="-122"/>
                 <a:cs typeface="Tiro Kannada" pitchFamily="34" charset="-120"/>
               </a:rPr>
-              <a:t>ನಿಷ್ಕಾಮಕರ್ಮಣೋ ಮಾರ್ಗಃ</a:t>
+              <a:t>à²¨à²¿à²·à³à²•à²¾à²®à²•à²°à³à²®à²£à³‹ à²®à²¾à²°à³à²—à²ƒ</a:t>
             </a:r>
             <a:endParaRPr lang="en-US" sz="1300" dirty="0"/>
           </a:p>
@@ -20820,7 +20820,7 @@
                 <a:ea typeface="Cormorant Garamond" pitchFamily="34" charset="-122"/>
                 <a:cs typeface="Cormorant Garamond" pitchFamily="34" charset="-120"/>
               </a:rPr>
-              <a:t>BG 3.3 · 3.19 · 5.2</a:t>
+              <a:t>BG 3.3 Â· 3.19 Â· 5.2</a:t>
             </a:r>
             <a:endParaRPr lang="en-US" sz="950" dirty="0"/>
           </a:p>
@@ -20862,7 +20862,7 @@
                 <a:ea typeface="Tiro Kannada" pitchFamily="34" charset="-122"/>
                 <a:cs typeface="Tiro Kannada" pitchFamily="34" charset="-120"/>
               </a:rPr>
-              <a:t>ಸ್ವಕೀಯಂ ಕರ್ತವ್ಯಂ ಹರಯೇ ಅರ್ಪಣಂ ಕೃತ್ವಾ, ಸರ್ವಫಲಂ ತಸ್ಮೈ ಸಮರ್ಪ್ಯ ಆಚರಣಮ್। ಶ್ರೀಕೃಷ್ಣಸ್ಯ ಅರ್ಜುನಾಯ ಪ್ರಮುಖೋಪದೇಶಃ।</a:t>
+              <a:t>à²¸à³à²µà²•à³€à²¯à²‚ à²•à²°à³à²¤à²µà³à²¯à²‚ à²¹à²°à²¯à³‡ à²…à²°à³à²ªà²£à²‚ à²•à³ƒà²¤à³à²µà²¾, à²¸à²°à³à²µà²«à²²à²‚ à²¤à²¸à³à²®à³ˆ à²¸à²®à²°à³à²ªà³à²¯ à²†à²šà²°à²£à²®à³à¥¤ à²¶à³à²°à³€à²•à³ƒà²·à³à²£à²¸à³à²¯ à²…à²°à³à²œà³à²¨à²¾à²¯ à²ªà³à²°à²®à³…</a:t>
             </a:r>
             <a:endParaRPr lang="en-US" sz="1050" dirty="0"/>
           </a:p>
@@ -20951,7 +20951,7 @@
                 <a:ea typeface="Tiro Kannada" pitchFamily="34" charset="-122"/>
                 <a:cs typeface="Tiro Kannada" pitchFamily="34" charset="-120"/>
               </a:rPr>
-              <a:t>ವಿವೇಕಜ್ಞಾನಮಾರ್ಗಃ</a:t>
+              <a:t>à²µà²¿à²µà³‡à²•à²œà³à²žà²¾à²¨à²®à²¾à²°à³à²—à²ƒ</a:t>
             </a:r>
             <a:endParaRPr lang="en-US" sz="1300" dirty="0"/>
           </a:p>
@@ -20990,7 +20990,7 @@
                 <a:ea typeface="Cormorant Garamond" pitchFamily="34" charset="-122"/>
                 <a:cs typeface="Cormorant Garamond" pitchFamily="34" charset="-120"/>
               </a:rPr>
-              <a:t>BG 3.3 · 4.33–38</a:t>
+              <a:t>BG 3.3 Â· 4.33â€“38</a:t>
             </a:r>
             <a:endParaRPr lang="en-US" sz="950" dirty="0"/>
           </a:p>
@@ -21032,7 +21032,7 @@
                 <a:ea typeface="Tiro Kannada" pitchFamily="34" charset="-122"/>
                 <a:cs typeface="Tiro Kannada" pitchFamily="34" charset="-120"/>
               </a:rPr>
-              <a:t>ಹರಿಂ ಪರಂ ಜ್ಞಾತ್ವಾ, ಜೀವಂ ತದಂಶಂ, ಜಗಚ್ಚ ತದಧೀನಂ ಸತ್ಯಂ ಜ್ಞಾತ್ವಾ ಪ್ರವೃತ್ತಿಃ। ಅಧಿಕಾರಿಣಾಂ ಸಾಧನಮ್।</a:t>
+              <a:t>à²¹à²°à²¿à²‚ à²ªà²°à²‚ à²œà³à²žà²¾à²¤à³à²µà²¾, à²œà³€à²µà²‚ à²¤à²¦à²‚à²¶à²‚, à²œà²—à²šà³à²š à²¤à²¦à²§à³€à²¨à²‚ à²¸à²¤à³à²¯à²‚ à²œà³à²žà²¾à²¤à³à²µà²¾ à²ªà³à²°à²µà³ƒà²¤à³à²¤à²¿à²ƒà¥¤ à²…à²§à²¿à²•à²¾à²°à²¿à²£à²¾à²‚ à²¸à²¾à²§à²¨à²®à³à¥¤</a:t>
             </a:r>
             <a:endParaRPr lang="en-US" sz="1050" dirty="0"/>
           </a:p>
@@ -21142,7 +21142,7 @@
                 <a:ea typeface="Tiro Kannada" pitchFamily="34" charset="-122"/>
                 <a:cs typeface="Tiro Kannada" pitchFamily="34" charset="-120"/>
               </a:rPr>
-              <a:t>ಸಾಧನಾ</a:t>
+              <a:t>à²¸à²¾à²§à²¨à²¾</a:t>
             </a:r>
             <a:endParaRPr lang="en-US" sz="3000" dirty="0"/>
           </a:p>
@@ -21273,7 +21273,7 @@
                 <a:ea typeface="Tiro Kannada" pitchFamily="34" charset="-122"/>
                 <a:cs typeface="Tiro Kannada" pitchFamily="34" charset="-120"/>
               </a:rPr>
-              <a:t>ಶ್ರದ್ಧಾ</a:t>
+              <a:t>à²¶à³à²°à²¦à³à²§à²¾</a:t>
             </a:r>
             <a:endParaRPr lang="en-US" sz="1300" dirty="0"/>
           </a:p>
@@ -21312,7 +21312,7 @@
                 <a:ea typeface="Cormorant Garamond" pitchFamily="34" charset="-122"/>
                 <a:cs typeface="Cormorant Garamond" pitchFamily="34" charset="-120"/>
               </a:rPr>
-              <a:t>BG 17.2–3</a:t>
+              <a:t>BG 17.2â€“3</a:t>
             </a:r>
             <a:endParaRPr lang="en-US" sz="950" dirty="0"/>
           </a:p>
@@ -21354,7 +21354,7 @@
                 <a:ea typeface="Tiro Kannada" pitchFamily="34" charset="-122"/>
                 <a:cs typeface="Tiro Kannada" pitchFamily="34" charset="-120"/>
               </a:rPr>
-              <a:t>ಶ್ರದ್ಧಾ ಸ್ವಭಾವಾನುಗಾ — ಯೋ ಯಚ್ಛ್ರದ್ಧಃ ಸ ಏವ ಸಃ। ಗುಣತಸ್ತ್ರಿವಿಧಾ — ದೇವೇಷು ಸಾತ್ತ್ವಿಕೀ, ಯಕ್ಷರಕ್ಷಃಸು ರಾಜಸೀ, ಭೂತಪ್ರೇತೇಷು ತಾಮಸೀ।</a:t>
+              <a:t>à²¶à³à²°à²¦à³à²§à²¾ à²¸à³à²µà²­à²¾à²µà²¾à²¨à³à²—à²¾ â€” à²¯à³‹ à²¯à²šà³à²›à³à²°à²¦à³à²§à²ƒ à²¸ à²à²µ à²¸à²ƒà¥¤ à²—à³à²£à²¤à²¸à³à²¤à³à²°à²¿à²µà²¿à²§à²¾ â€” à²¦à³‡à²µà³‡à²·à³ à²¸à²¾à²¤à³à²¤à³à²µà²¿à²•à³€, à²¯à²•à³à²·à²°à²•à³à²·à²ƒà²¸à³ à²°à²¾à…</a:t>
             </a:r>
             <a:endParaRPr lang="en-US" sz="1050" dirty="0"/>
           </a:p>
@@ -21443,7 +21443,7 @@
                 <a:ea typeface="Tiro Kannada" pitchFamily="34" charset="-122"/>
                 <a:cs typeface="Tiro Kannada" pitchFamily="34" charset="-120"/>
               </a:rPr>
-              <a:t>ವೈರಾಗ್ಯಮ್</a:t>
+              <a:t>à²µà³ˆà²°à²¾à²—à³à²¯à²®à³</a:t>
             </a:r>
             <a:endParaRPr lang="en-US" sz="1300" dirty="0"/>
           </a:p>
@@ -21482,7 +21482,7 @@
                 <a:ea typeface="Cormorant Garamond" pitchFamily="34" charset="-122"/>
                 <a:cs typeface="Cormorant Garamond" pitchFamily="34" charset="-120"/>
               </a:rPr>
-              <a:t>BG 6.35 · 13.8–11</a:t>
+              <a:t>BG 6.35 Â· 13.8â€“11</a:t>
             </a:r>
             <a:endParaRPr lang="en-US" sz="950" dirty="0"/>
           </a:p>
@@ -21524,7 +21524,7 @@
                 <a:ea typeface="Tiro Kannada" pitchFamily="34" charset="-122"/>
                 <a:cs typeface="Tiro Kannada" pitchFamily="34" charset="-120"/>
               </a:rPr>
-              <a:t>ವಿಷಯೇಭ್ಯೋ ವಿರಕ್ತಿಃ — ನ ಜೀವನನಿಷೇಧಃ, ಅಪಿ ತು ಬಂಧನಪ್ರದಾಕರ್ಷಣಾನಾಂ ವಿವೇಕೇನ ದರ್ಶನಮ್।</a:t>
+              <a:t>à²µà²¿à²·à²¯à³‡à²­à³à²¯à³‹ à²µà²¿à²°à²•à³à²¤à²¿à²ƒ â€” à²¨ à²œà³€à²µà²¨à²¨à²¿à²·à³‡à²§à²ƒ, à²…à²ªà²¿ à²¤à³ à²¬à²‚à²§à²¨à²ªà³à²°à²¦à²¾à²•à²°à³à²·à²£à²¾à²¨à²¾à²‚ à²µà²¿à²µà³‡à²•à³‡à²¨ à²¦à²°à³à²¶à²¨à²®à³à¥¤</a:t>
             </a:r>
             <a:endParaRPr lang="en-US" sz="1050" dirty="0"/>
           </a:p>
@@ -21613,7 +21613,7 @@
                 <a:ea typeface="Tiro Kannada" pitchFamily="34" charset="-122"/>
                 <a:cs typeface="Tiro Kannada" pitchFamily="34" charset="-120"/>
               </a:rPr>
-              <a:t>ಅಭ್ಯಾಸಃ</a:t>
+              <a:t>à²…à²­à³à²¯à²¾à²¸à²ƒ</a:t>
             </a:r>
             <a:endParaRPr lang="en-US" sz="1300" dirty="0"/>
           </a:p>
@@ -21652,7 +21652,7 @@
                 <a:ea typeface="Cormorant Garamond" pitchFamily="34" charset="-122"/>
                 <a:cs typeface="Cormorant Garamond" pitchFamily="34" charset="-120"/>
               </a:rPr>
-              <a:t>BG 6.26 · 12.9</a:t>
+              <a:t>BG 6.26 Â· 12.9</a:t>
             </a:r>
             <a:endParaRPr lang="en-US" sz="950" dirty="0"/>
           </a:p>
@@ -21694,7 +21694,7 @@
                 <a:ea typeface="Tiro Kannada" pitchFamily="34" charset="-122"/>
                 <a:cs typeface="Tiro Kannada" pitchFamily="34" charset="-120"/>
               </a:rPr>
-              <a:t>ಸಮಾಧ್ಯಭ್ಯಾಸಃ — ಚಂಚಲಂ ಮನಃ ಪುನಃಪುನಃ ನಿವರ್ತ್ಯ ಹರೌ ನಿಯಮನಮ್।</a:t>
+              <a:t>à²¸à²®à²¾à²§à³à²¯à²­à³à²¯à²¾à²¸à²ƒ â€” à²šà²‚à²šà²²à²‚ à²®à²¨à²ƒ à²ªà³à²¨à²ƒà²ªà³à²¨à²ƒ à²¨à²¿à²µà²°à³à²¤à³à²¯ à²¹à²°à³Œ à²¨à²¿à²¯à²®à²¨à²®à³à¥¤</a:t>
             </a:r>
             <a:endParaRPr lang="en-US" sz="1050" dirty="0"/>
           </a:p>
@@ -21783,7 +21783,7 @@
                 <a:ea typeface="Tiro Kannada" pitchFamily="34" charset="-122"/>
                 <a:cs typeface="Tiro Kannada" pitchFamily="34" charset="-120"/>
               </a:rPr>
-              <a:t>ತಪಃ (ತ್ರಿವಿಧಮ್)</a:t>
+              <a:t>à²¤à²ªà²ƒ (à²¤à³à²°à²¿à²µà²¿à²§à²®à³)</a:t>
             </a:r>
             <a:endParaRPr lang="en-US" sz="1300" dirty="0"/>
           </a:p>
@@ -21822,7 +21822,7 @@
                 <a:ea typeface="Cormorant Garamond" pitchFamily="34" charset="-122"/>
                 <a:cs typeface="Cormorant Garamond" pitchFamily="34" charset="-120"/>
               </a:rPr>
-              <a:t>BG 17.14–19</a:t>
+              <a:t>BG 17.14â€“19</a:t>
             </a:r>
             <a:endParaRPr lang="en-US" sz="950" dirty="0"/>
           </a:p>
@@ -21864,7 +21864,7 @@
                 <a:ea typeface="Tiro Kannada" pitchFamily="34" charset="-122"/>
                 <a:cs typeface="Tiro Kannada" pitchFamily="34" charset="-120"/>
               </a:rPr>
-              <a:t>ದೇಹಸ್ಯ ತಪಃ (ಪೂಜಾ/ಶೌಚ/ಬ್ರಹ್ಮಚರ್ಯ), ವಾಚಿಕಂ (ಸತ್ಯ/ಪ್ರಿಯ/ಸ್ವಾಧ್ಯಾಯ), ಮಾನಸಿಕಂ (ಪ್ರಸಾದ/ಮೌನ/ಆತ್ಮನಿಗ್ರಹ)। ತ್ರಯಂ ಗುಣಭೇದಾತ್ ತ್ರಿವಿಧಮ್।</a:t>
+              <a:t>à²¦à³‡à²¹à²¸à³à²¯ à²¤à²ªà²ƒ (à²ªà³‚à²œà²¾/à²¶à³Œà²š/à²¬à³à²°à²¹à³à²®à²šà²°à³à²¯), à²µà²¾à²šà²¿à²•à²‚ (à²¸à²¤à³à²¯/à²ªà³à²°à²¿à²¯/à²¸à³à²µà²¾à²§à³à²¯à²¾à²¯), à²®à²¾à²¨à²¸à²¿à²•à²‚ (à²ªà³à²°à²¸à²¾à²¦/à²®à³Œà²¨/à²†à²¤à³à²®à²¨à²¿à²—à³à²°à²¹)à¥¤ à²¤à³…</a:t>
             </a:r>
             <a:endParaRPr lang="en-US" sz="1050" dirty="0"/>
           </a:p>
